--- a/thesis/evidencing/2026-27 Learning Log Graduation Project.pptx
+++ b/thesis/evidencing/2026-27 Learning Log Graduation Project.pptx
@@ -89,40 +89,40 @@
       <p:italic r:id="rId78"/>
     </p:embeddedFont>
     <p:embeddedFont>
-      <p:font typeface="Roboto Thin" panose="020B0604020202020204" charset="0"/>
+      <p:font typeface="Segoe UI" panose="020B0502040204020203" pitchFamily="34" charset="0"/>
       <p:regular r:id="rId79"/>
-      <p:italic r:id="rId80"/>
+      <p:bold r:id="rId80"/>
+      <p:italic r:id="rId81"/>
+      <p:boldItalic r:id="rId82"/>
+    </p:embeddedFont>
+    <p:embeddedFont>
+      <p:font typeface="Roboto" panose="02000000000000000000" pitchFamily="2" charset="0"/>
+      <p:regular r:id="rId83"/>
+      <p:bold r:id="rId84"/>
+      <p:italic r:id="rId85"/>
+      <p:boldItalic r:id="rId86"/>
+    </p:embeddedFont>
+    <p:embeddedFont>
+      <p:font typeface="Open Sans" panose="020B0604020202020204" charset="0"/>
+      <p:regular r:id="rId87"/>
+      <p:bold r:id="rId88"/>
+      <p:italic r:id="rId89"/>
+      <p:boldItalic r:id="rId90"/>
     </p:embeddedFont>
     <p:embeddedFont>
       <p:font typeface="Helvetica Neue" panose="020B0604020202020204" charset="0"/>
-      <p:regular r:id="rId81"/>
-      <p:bold r:id="rId82"/>
-      <p:italic r:id="rId83"/>
-      <p:boldItalic r:id="rId84"/>
+      <p:regular r:id="rId91"/>
+      <p:bold r:id="rId92"/>
+      <p:italic r:id="rId93"/>
+      <p:boldItalic r:id="rId94"/>
+    </p:embeddedFont>
+    <p:embeddedFont>
+      <p:font typeface="Roboto Thin" panose="020B0604020202020204" charset="0"/>
+      <p:regular r:id="rId95"/>
+      <p:italic r:id="rId96"/>
     </p:embeddedFont>
     <p:embeddedFont>
       <p:font typeface="Proxima Nova" panose="020B0604020202020204" charset="0"/>
-      <p:regular r:id="rId85"/>
-      <p:bold r:id="rId86"/>
-      <p:italic r:id="rId87"/>
-      <p:boldItalic r:id="rId88"/>
-    </p:embeddedFont>
-    <p:embeddedFont>
-      <p:font typeface="Roboto" panose="02000000000000000000" pitchFamily="2" charset="0"/>
-      <p:regular r:id="rId89"/>
-      <p:bold r:id="rId90"/>
-      <p:italic r:id="rId91"/>
-      <p:boldItalic r:id="rId92"/>
-    </p:embeddedFont>
-    <p:embeddedFont>
-      <p:font typeface="Segoe UI" panose="020B0502040204020203" pitchFamily="34" charset="0"/>
-      <p:regular r:id="rId93"/>
-      <p:bold r:id="rId94"/>
-      <p:italic r:id="rId95"/>
-      <p:boldItalic r:id="rId96"/>
-    </p:embeddedFont>
-    <p:embeddedFont>
-      <p:font typeface="Open Sans" panose="020B0604020202020204" charset="0"/>
       <p:regular r:id="rId97"/>
       <p:bold r:id="rId98"/>
       <p:italic r:id="rId99"/>
@@ -16849,11 +16849,7 @@
             </a:r>
             <a:r>
               <a:rPr lang="en-GB" dirty="0" smtClean="0"/>
-              <a:t>A</a:t>
-            </a:r>
-            <a:r>
-              <a:rPr lang="en-GB" dirty="0" smtClean="0"/>
-              <a:t>rchitecture </a:t>
+              <a:t>Architecture </a:t>
             </a:r>
             <a:r>
               <a:rPr lang="en-GB" dirty="0"/>
@@ -16869,11 +16865,7 @@
             </a:r>
             <a:r>
               <a:rPr lang="en-GB" dirty="0" smtClean="0"/>
-              <a:t>P</a:t>
-            </a:r>
-            <a:r>
-              <a:rPr lang="en-GB" dirty="0" smtClean="0"/>
-              <a:t>roceed </a:t>
+              <a:t>Proceed </a:t>
             </a:r>
             <a:r>
               <a:rPr lang="en-GB" dirty="0"/>
@@ -17511,7 +17503,7 @@
             </a:r>
           </a:p>
           <a:p>
-            <a:pPr marL="182880" lvl="0" indent="-154940" algn="l" rtl="0">
+            <a:pPr marL="27940" lvl="0" indent="0" algn="l" rtl="0">
               <a:spcBef>
                 <a:spcPts val="0"/>
               </a:spcBef>
@@ -17519,19 +17511,9 @@
                 <a:spcPts val="0"/>
               </a:spcAft>
               <a:buSzPts val="1000"/>
-              <a:buChar char="●"/>
+              <a:buNone/>
             </a:pPr>
             <a:endParaRPr lang="en" dirty="0"/>
-          </a:p>
-          <a:p>
-            <a:pPr marL="27940" lvl="0" indent="0">
-              <a:buNone/>
-            </a:pPr>
-            <a:r>
-              <a:rPr lang="en-GB" dirty="0"/>
-              <a:t>data/processed/small/ built and verified; conversion script in scripts/.</a:t>
-            </a:r>
-            <a:endParaRPr dirty="0"/>
           </a:p>
         </p:txBody>
       </p:sp>
@@ -17908,6 +17890,136 @@
           </a:p>
         </p:txBody>
       </p:sp>
+      <p:graphicFrame>
+        <p:nvGraphicFramePr>
+          <p:cNvPr id="2" name="Table 1"/>
+          <p:cNvGraphicFramePr>
+            <a:graphicFrameLocks noGrp="1"/>
+          </p:cNvGraphicFramePr>
+          <p:nvPr>
+            <p:extLst>
+              <p:ext uri="{D42A27DB-BD31-4B8C-83A1-F6EECF244321}">
+                <p14:modId xmlns:p14="http://schemas.microsoft.com/office/powerpoint/2010/main" val="3873338517"/>
+              </p:ext>
+            </p:extLst>
+          </p:nvPr>
+        </p:nvGraphicFramePr>
+        <p:xfrm>
+          <a:off x="384313" y="3525078"/>
+          <a:ext cx="1702904" cy="638175"/>
+        </p:xfrm>
+        <a:graphic>
+          <a:graphicData uri="http://schemas.openxmlformats.org/drawingml/2006/table">
+            <a:tbl>
+              <a:tblPr>
+                <a:tableStyleId>{764D4AE7-FFBC-431D-9275-528F30A785D3}</a:tableStyleId>
+              </a:tblPr>
+              <a:tblGrid>
+                <a:gridCol w="1702904">
+                  <a:extLst>
+                    <a:ext uri="{9D8B030D-6E8A-4147-A177-3AD203B41FA5}">
+                      <a16:colId xmlns:a16="http://schemas.microsoft.com/office/drawing/2014/main" val="2647405054"/>
+                    </a:ext>
+                  </a:extLst>
+                </a:gridCol>
+              </a:tblGrid>
+              <a:tr h="161925">
+                <a:tc>
+                  <a:txBody>
+                    <a:bodyPr/>
+                    <a:lstStyle/>
+                    <a:p>
+                      <a:pPr algn="l" fontAlgn="b"/>
+                      <a:r>
+                        <a:rPr lang="en-GB" sz="1000" u="sng" strike="noStrike" dirty="0">
+                          <a:effectLst/>
+                          <a:hlinkClick r:id="rId3"/>
+                        </a:rPr>
+                        <a:t>data</a:t>
+                      </a:r>
+                      <a:endParaRPr lang="en-GB" sz="1000" b="0" i="0" u="sng" strike="noStrike" dirty="0">
+                        <a:solidFill>
+                          <a:srgbClr val="0563C1"/>
+                        </a:solidFill>
+                        <a:effectLst/>
+                        <a:latin typeface="Arial" panose="020B0604020202020204" pitchFamily="34" charset="0"/>
+                      </a:endParaRPr>
+                    </a:p>
+                  </a:txBody>
+                  <a:tcPr marL="9525" marR="9525" marT="9525" marB="0" anchor="b"/>
+                </a:tc>
+                <a:extLst>
+                  <a:ext uri="{0D108BD9-81ED-4DB2-BD59-A6C34878D82A}">
+                    <a16:rowId xmlns:a16="http://schemas.microsoft.com/office/drawing/2014/main" val="2532099476"/>
+                  </a:ext>
+                </a:extLst>
+              </a:tr>
+              <a:tr h="161925">
+                <a:tc>
+                  <a:txBody>
+                    <a:bodyPr/>
+                    <a:lstStyle/>
+                    <a:p>
+                      <a:pPr algn="l" fontAlgn="b"/>
+                      <a:r>
+                        <a:rPr lang="en-GB" sz="1000" u="sng" strike="noStrike" dirty="0">
+                          <a:effectLst/>
+                          <a:hlinkClick r:id="rId4"/>
+                        </a:rPr>
+                        <a:t>visual dataset inspection notebook</a:t>
+                      </a:r>
+                      <a:endParaRPr lang="en-GB" sz="1000" b="0" i="0" u="sng" strike="noStrike" dirty="0">
+                        <a:solidFill>
+                          <a:srgbClr val="0563C1"/>
+                        </a:solidFill>
+                        <a:effectLst/>
+                        <a:latin typeface="Arial" panose="020B0604020202020204" pitchFamily="34" charset="0"/>
+                      </a:endParaRPr>
+                    </a:p>
+                  </a:txBody>
+                  <a:tcPr marL="9525" marR="9525" marT="9525" marB="0" anchor="b"/>
+                </a:tc>
+                <a:extLst>
+                  <a:ext uri="{0D108BD9-81ED-4DB2-BD59-A6C34878D82A}">
+                    <a16:rowId xmlns:a16="http://schemas.microsoft.com/office/drawing/2014/main" val="673156909"/>
+                  </a:ext>
+                </a:extLst>
+              </a:tr>
+              <a:tr h="161925">
+                <a:tc>
+                  <a:txBody>
+                    <a:bodyPr/>
+                    <a:lstStyle/>
+                    <a:p>
+                      <a:pPr algn="l" fontAlgn="b"/>
+                      <a:r>
+                        <a:rPr lang="en-GB" sz="1000" u="sng" strike="noStrike" dirty="0">
+                          <a:effectLst/>
+                          <a:hlinkClick r:id="rId5"/>
+                        </a:rPr>
+                        <a:t>scripts/</a:t>
+                      </a:r>
+                      <a:endParaRPr lang="en-GB" sz="1000" b="0" i="0" u="sng" strike="noStrike" dirty="0">
+                        <a:solidFill>
+                          <a:srgbClr val="0563C1"/>
+                        </a:solidFill>
+                        <a:effectLst/>
+                        <a:latin typeface="Arial" panose="020B0604020202020204" pitchFamily="34" charset="0"/>
+                      </a:endParaRPr>
+                    </a:p>
+                  </a:txBody>
+                  <a:tcPr marL="9525" marR="9525" marT="9525" marB="0" anchor="b"/>
+                </a:tc>
+                <a:extLst>
+                  <a:ext uri="{0D108BD9-81ED-4DB2-BD59-A6C34878D82A}">
+                    <a16:rowId xmlns:a16="http://schemas.microsoft.com/office/drawing/2014/main" val="2135732429"/>
+                  </a:ext>
+                </a:extLst>
+              </a:tr>
+            </a:tbl>
+          </a:graphicData>
+        </a:graphic>
+      </p:graphicFrame>
     </p:spTree>
     <p:extLst>
       <p:ext uri="{BB962C8B-B14F-4D97-AF65-F5344CB8AC3E}">
@@ -18054,17 +18166,12 @@
             </a:r>
             <a:r>
               <a:rPr lang="en" b="1" dirty="0"/>
-              <a:t>ate</a:t>
-            </a:r>
-            <a:r>
-              <a:rPr lang="en" b="1" dirty="0"/>
-              <a:t>: </a:t>
+              <a:t>ate: </a:t>
             </a:r>
             <a:r>
               <a:rPr lang="en" dirty="0"/>
               <a:t>22/04/2026</a:t>
             </a:r>
-            <a:endParaRPr lang="en" dirty="0"/>
           </a:p>
           <a:p>
             <a:pPr marL="182880" lvl="0" indent="-154940" algn="l" rtl="0">
@@ -18122,11 +18229,7 @@
             </a:r>
             <a:r>
               <a:rPr lang="en-GB" dirty="0" smtClean="0"/>
-              <a:t>S</a:t>
-            </a:r>
-            <a:r>
-              <a:rPr lang="en-GB" dirty="0" smtClean="0"/>
-              <a:t>mall </a:t>
+              <a:t>Small </a:t>
             </a:r>
             <a:r>
               <a:rPr lang="en-GB" dirty="0"/>
@@ -18142,11 +18245,7 @@
             </a:r>
             <a:r>
               <a:rPr lang="en-GB" dirty="0" smtClean="0"/>
-              <a:t>D</a:t>
-            </a:r>
-            <a:r>
-              <a:rPr lang="en-GB" dirty="0" smtClean="0"/>
-              <a:t>ocumented </a:t>
+              <a:t>Documented </a:t>
             </a:r>
             <a:r>
               <a:rPr lang="en-GB" dirty="0"/>
@@ -18568,14 +18667,89 @@
             <a:endParaRPr lang="en" dirty="0" smtClean="0"/>
           </a:p>
           <a:p>
+            <a:pPr marL="27940" lvl="0" indent="0" algn="l" rtl="0">
+              <a:spcBef>
+                <a:spcPts val="0"/>
+              </a:spcBef>
+              <a:spcAft>
+                <a:spcPts val="0"/>
+              </a:spcAft>
+              <a:buSzPts val="1000"/>
+              <a:buNone/>
+            </a:pPr>
+            <a:endParaRPr lang="en" dirty="0"/>
+          </a:p>
+          <a:p>
             <a:pPr marL="27940" lvl="0" indent="0">
               <a:buNone/>
             </a:pPr>
             <a:r>
+              <a:rPr lang="en-GB" u="sng" dirty="0">
+                <a:hlinkClick r:id="rId3"/>
+              </a:rPr>
+              <a:t>first YOLO training</a:t>
+            </a:r>
+            <a:r>
               <a:rPr lang="en-GB" dirty="0"/>
-              <a:t>first checkpoints in runs/; first evaluation numbers in outputs/reports/.</a:t>
-            </a:r>
-            <a:endParaRPr dirty="0"/>
+              <a:t> </a:t>
+            </a:r>
+            <a:endParaRPr lang="en-GB" dirty="0" smtClean="0"/>
+          </a:p>
+          <a:p>
+            <a:pPr marL="27940" lvl="0" indent="0">
+              <a:buNone/>
+            </a:pPr>
+            <a:endParaRPr lang="en-GB" dirty="0"/>
+          </a:p>
+          <a:p>
+            <a:pPr marL="27940" lvl="0" indent="0">
+              <a:buNone/>
+            </a:pPr>
+            <a:r>
+              <a:rPr lang="en-GB" u="sng" dirty="0">
+                <a:hlinkClick r:id="rId4"/>
+              </a:rPr>
+              <a:t>first </a:t>
+            </a:r>
+            <a:r>
+              <a:rPr lang="en-GB" u="sng" dirty="0" err="1">
+                <a:hlinkClick r:id="rId4"/>
+              </a:rPr>
+              <a:t>FasteRNN</a:t>
+            </a:r>
+            <a:r>
+              <a:rPr lang="en-GB" u="sng" dirty="0">
+                <a:hlinkClick r:id="rId4"/>
+              </a:rPr>
+              <a:t> training</a:t>
+            </a:r>
+            <a:r>
+              <a:rPr lang="en-GB" dirty="0"/>
+              <a:t> </a:t>
+            </a:r>
+            <a:endParaRPr lang="en-GB" dirty="0" smtClean="0"/>
+          </a:p>
+          <a:p>
+            <a:pPr marL="27940" lvl="0" indent="0">
+              <a:buNone/>
+            </a:pPr>
+            <a:endParaRPr lang="en-GB" dirty="0"/>
+          </a:p>
+          <a:p>
+            <a:pPr marL="27940" lvl="0" indent="0">
+              <a:buNone/>
+            </a:pPr>
+            <a:r>
+              <a:rPr lang="en-GB" u="sng" dirty="0">
+                <a:hlinkClick r:id="rId5"/>
+              </a:rPr>
+              <a:t>Product architecture plan</a:t>
+            </a:r>
+            <a:r>
+              <a:rPr lang="en-GB" dirty="0"/>
+              <a:t> </a:t>
+            </a:r>
+            <a:endParaRPr lang="en" dirty="0" smtClean="0"/>
           </a:p>
         </p:txBody>
       </p:sp>
@@ -18618,7 +18792,6 @@
               <a:rPr lang="en" dirty="0"/>
               <a:t>How did the week go? </a:t>
             </a:r>
-            <a:endParaRPr lang="en" dirty="0"/>
           </a:p>
           <a:p>
             <a:pPr marL="27940" lvl="0" indent="0">
@@ -19065,17 +19238,12 @@
             </a:r>
             <a:r>
               <a:rPr lang="en" b="1" dirty="0"/>
-              <a:t>ate</a:t>
-            </a:r>
-            <a:r>
-              <a:rPr lang="en" b="1" dirty="0"/>
-              <a:t>: </a:t>
+              <a:t>ate: </a:t>
             </a:r>
             <a:r>
               <a:rPr lang="en" dirty="0"/>
               <a:t>29/04/2026</a:t>
             </a:r>
-            <a:endParaRPr lang="en" dirty="0"/>
           </a:p>
           <a:p>
             <a:pPr marL="182880" lvl="0" indent="-154940"/>
@@ -19133,11 +19301,7 @@
             </a:r>
             <a:r>
               <a:rPr lang="en-GB" dirty="0" smtClean="0"/>
-              <a:t>A</a:t>
-            </a:r>
-            <a:r>
-              <a:rPr lang="en-GB" dirty="0" smtClean="0"/>
-              <a:t>rchitecture </a:t>
+              <a:t>Architecture </a:t>
             </a:r>
             <a:r>
               <a:rPr lang="en-GB" dirty="0"/>
@@ -19153,11 +19317,7 @@
             </a:r>
             <a:r>
               <a:rPr lang="en-GB" dirty="0" smtClean="0"/>
-              <a:t>P</a:t>
-            </a:r>
-            <a:r>
-              <a:rPr lang="en-GB" dirty="0" smtClean="0"/>
-              <a:t>roceed </a:t>
+              <a:t>Proceed </a:t>
             </a:r>
             <a:r>
               <a:rPr lang="en-GB" dirty="0"/>
@@ -19538,26 +19698,151 @@
             </a:r>
           </a:p>
           <a:p>
+            <a:pPr marL="182880" lvl="0" indent="-154940" algn="l" rtl="0">
+              <a:spcBef>
+                <a:spcPts val="0"/>
+              </a:spcBef>
+              <a:spcAft>
+                <a:spcPts val="0"/>
+              </a:spcAft>
+              <a:buSzPts val="1000"/>
+              <a:buChar char="●"/>
+            </a:pPr>
+            <a:endParaRPr lang="en" dirty="0"/>
+          </a:p>
+          <a:p>
+            <a:pPr marL="182880" lvl="0" indent="-154940" algn="l" rtl="0">
+              <a:spcBef>
+                <a:spcPts val="0"/>
+              </a:spcBef>
+              <a:spcAft>
+                <a:spcPts val="0"/>
+              </a:spcAft>
+              <a:buSzPts val="1000"/>
+              <a:buChar char="●"/>
+            </a:pPr>
+            <a:endParaRPr lang="en" dirty="0" smtClean="0"/>
+          </a:p>
+          <a:p>
             <a:pPr marL="27940" lvl="0" indent="0">
               <a:buNone/>
             </a:pPr>
             <a:r>
-              <a:rPr lang="en-GB" dirty="0" err="1"/>
+              <a:rPr lang="en-GB" u="sng" dirty="0" err="1">
+                <a:hlinkClick r:id="rId3"/>
+              </a:rPr>
+              <a:t>config</a:t>
+            </a:r>
+            <a:r>
+              <a:rPr lang="en-GB" u="sng" dirty="0">
+                <a:hlinkClick r:id="rId3"/>
+              </a:rPr>
+              <a:t>/</a:t>
+            </a:r>
+            <a:r>
+              <a:rPr lang="en-GB" u="sng" dirty="0" err="1">
+                <a:hlinkClick r:id="rId3"/>
+              </a:rPr>
+              <a:t>risk_weights.yaml</a:t>
+            </a:r>
+            <a:r>
+              <a:rPr lang="en-GB" dirty="0"/>
+              <a:t> </a:t>
+            </a:r>
+            <a:endParaRPr lang="en-GB" dirty="0" smtClean="0"/>
+          </a:p>
+          <a:p>
+            <a:pPr marL="27940" lvl="0" indent="0">
+              <a:buNone/>
+            </a:pPr>
+            <a:endParaRPr lang="en-GB" dirty="0"/>
+          </a:p>
+          <a:p>
+            <a:pPr marL="27940" lvl="0" indent="0">
+              <a:buNone/>
+            </a:pPr>
+            <a:r>
+              <a:rPr lang="en-GB" u="sng" dirty="0">
+                <a:hlinkClick r:id="rId4"/>
+              </a:rPr>
+              <a:t>src/risk/scoring.py</a:t>
+            </a:r>
+            <a:r>
+              <a:rPr lang="en-GB" dirty="0"/>
+              <a:t> </a:t>
+            </a:r>
+            <a:endParaRPr lang="en-GB" dirty="0" smtClean="0"/>
+          </a:p>
+          <a:p>
+            <a:pPr marL="27940" lvl="0" indent="0">
+              <a:buNone/>
+            </a:pPr>
+            <a:endParaRPr lang="en-GB" dirty="0"/>
+          </a:p>
+          <a:p>
+            <a:pPr marL="27940" lvl="0" indent="0">
+              <a:buNone/>
+            </a:pPr>
+            <a:r>
+              <a:rPr lang="en-GB" u="sng" dirty="0">
+                <a:hlinkClick r:id="rId5"/>
+              </a:rPr>
+              <a:t>src/risk/observation_risk.py</a:t>
+            </a:r>
+            <a:r>
+              <a:rPr lang="en-GB" dirty="0"/>
+              <a:t> </a:t>
+            </a:r>
+            <a:endParaRPr lang="en-GB" dirty="0" smtClean="0"/>
+          </a:p>
+          <a:p>
+            <a:pPr marL="27940" lvl="0" indent="0">
+              <a:buNone/>
+            </a:pPr>
+            <a:endParaRPr lang="en-GB" dirty="0" smtClean="0"/>
+          </a:p>
+          <a:p>
+            <a:pPr marL="27940" lvl="0" indent="0">
+              <a:buNone/>
+            </a:pPr>
+            <a:r>
+              <a:rPr lang="en-GB" u="sng" dirty="0" err="1">
+                <a:hlinkClick r:id="rId6"/>
+              </a:rPr>
               <a:t>src</a:t>
             </a:r>
             <a:r>
+              <a:rPr lang="en-GB" u="sng" dirty="0">
+                <a:hlinkClick r:id="rId6"/>
+              </a:rPr>
+              <a:t>/risk/</a:t>
+            </a:r>
+            <a:r>
               <a:rPr lang="en-GB" dirty="0"/>
-              <a:t>/risk/scoring.py, combine.py, observation_risk.py, </a:t>
-            </a:r>
-            <a:r>
-              <a:rPr lang="en-GB" dirty="0" err="1"/>
-              <a:t>risk_weights.yaml</a:t>
+              <a:t> </a:t>
+            </a:r>
+            <a:endParaRPr lang="en-GB" dirty="0" smtClean="0"/>
+          </a:p>
+          <a:p>
+            <a:pPr marL="27940" lvl="0" indent="0">
+              <a:buNone/>
+            </a:pPr>
+            <a:endParaRPr lang="en-GB" dirty="0"/>
+          </a:p>
+          <a:p>
+            <a:pPr marL="27940" lvl="0" indent="0">
+              <a:buNone/>
+            </a:pPr>
+            <a:r>
+              <a:rPr lang="en-GB" u="sng" dirty="0">
+                <a:hlinkClick r:id="rId7"/>
+              </a:rPr>
+              <a:t>thesis 3.3</a:t>
             </a:r>
             <a:r>
               <a:rPr lang="en-GB" dirty="0"/>
-              <a:t>; passing edge-case tests.</a:t>
-            </a:r>
-            <a:endParaRPr dirty="0"/>
+              <a:t> </a:t>
+            </a:r>
           </a:p>
         </p:txBody>
       </p:sp>
@@ -19600,7 +19885,6 @@
               <a:rPr lang="en" dirty="0"/>
               <a:t>How did the week go? </a:t>
             </a:r>
-            <a:endParaRPr lang="en" dirty="0"/>
           </a:p>
           <a:p>
             <a:pPr marL="27940" lvl="0" indent="0" algn="l" rtl="0">
@@ -20077,17 +20361,12 @@
             </a:r>
             <a:r>
               <a:rPr lang="en" b="1" dirty="0"/>
-              <a:t>ate</a:t>
-            </a:r>
-            <a:r>
-              <a:rPr lang="en" b="1" dirty="0"/>
-              <a:t>: </a:t>
+              <a:t>ate: </a:t>
             </a:r>
             <a:r>
               <a:rPr lang="en" dirty="0"/>
               <a:t>08/05/2026</a:t>
             </a:r>
-            <a:endParaRPr lang="en" dirty="0"/>
           </a:p>
           <a:p>
             <a:pPr marL="182880" lvl="0" indent="-154940" algn="l" rtl="0">
@@ -20146,11 +20425,7 @@
             </a:r>
             <a:r>
               <a:rPr lang="en-GB" dirty="0" smtClean="0"/>
-              <a:t>R</a:t>
-            </a:r>
-            <a:r>
-              <a:rPr lang="en-GB" dirty="0" smtClean="0"/>
-              <a:t>isk-scoring </a:t>
+              <a:t>Risk-scoring </a:t>
             </a:r>
             <a:r>
               <a:rPr lang="en-GB" dirty="0"/>
@@ -20166,11 +20441,7 @@
             </a:r>
             <a:r>
               <a:rPr lang="en-GB" dirty="0" smtClean="0"/>
-              <a:t>A</a:t>
-            </a:r>
-            <a:r>
-              <a:rPr lang="en-GB" dirty="0" smtClean="0"/>
-              <a:t>dded </a:t>
+              <a:t>Added </a:t>
             </a:r>
             <a:r>
               <a:rPr lang="en-GB" dirty="0"/>
@@ -20560,21 +20831,120 @@
               <a:buNone/>
             </a:pPr>
             <a:r>
-              <a:rPr lang="en-GB" dirty="0" err="1"/>
-              <a:t>src</a:t>
+              <a:rPr lang="en-GB" u="sng" dirty="0">
+                <a:hlinkClick r:id="rId3"/>
+              </a:rPr>
+              <a:t>src/geospatial/network.py</a:t>
             </a:r>
             <a:r>
               <a:rPr lang="en-GB" dirty="0"/>
-              <a:t>/geospatial/, </a:t>
-            </a:r>
-            <a:r>
-              <a:rPr lang="en-GB" dirty="0" err="1"/>
-              <a:t>src</a:t>
+              <a:t> </a:t>
+            </a:r>
+            <a:endParaRPr lang="en-GB" dirty="0" smtClean="0"/>
+          </a:p>
+          <a:p>
+            <a:pPr marL="27940" lvl="0" indent="0">
+              <a:buNone/>
+            </a:pPr>
+            <a:endParaRPr lang="en-GB" dirty="0"/>
+          </a:p>
+          <a:p>
+            <a:pPr marL="27940" lvl="0" indent="0">
+              <a:buNone/>
+            </a:pPr>
+            <a:r>
+              <a:rPr lang="en-GB" u="sng" dirty="0">
+                <a:hlinkClick r:id="rId4"/>
+              </a:rPr>
+              <a:t>src/geospatial/matching.py</a:t>
             </a:r>
             <a:r>
               <a:rPr lang="en-GB" dirty="0"/>
-              <a:t>/routing/router.py; working shortest-vs-risk-aware comparison on sample data.</a:t>
-            </a:r>
+              <a:t> </a:t>
+            </a:r>
+            <a:endParaRPr lang="en-GB" dirty="0" smtClean="0"/>
+          </a:p>
+          <a:p>
+            <a:pPr marL="27940" lvl="0" indent="0">
+              <a:buNone/>
+            </a:pPr>
+            <a:endParaRPr lang="en-GB" dirty="0"/>
+          </a:p>
+          <a:p>
+            <a:pPr marL="27940" lvl="0" indent="0">
+              <a:buNone/>
+            </a:pPr>
+            <a:r>
+              <a:rPr lang="en-GB" u="sng" dirty="0">
+                <a:hlinkClick r:id="rId5"/>
+              </a:rPr>
+              <a:t>src/risk/segment_aggregation.py</a:t>
+            </a:r>
+            <a:r>
+              <a:rPr lang="en-GB" dirty="0"/>
+              <a:t> </a:t>
+            </a:r>
+            <a:endParaRPr lang="en-GB" dirty="0" smtClean="0"/>
+          </a:p>
+          <a:p>
+            <a:pPr marL="27940" lvl="0" indent="0">
+              <a:buNone/>
+            </a:pPr>
+            <a:endParaRPr lang="en-GB" dirty="0"/>
+          </a:p>
+          <a:p>
+            <a:pPr marL="27940" lvl="0" indent="0">
+              <a:buNone/>
+            </a:pPr>
+            <a:r>
+              <a:rPr lang="en-GB" u="sng" dirty="0">
+                <a:hlinkClick r:id="rId6"/>
+              </a:rPr>
+              <a:t>src/routing/router.py</a:t>
+            </a:r>
+            <a:r>
+              <a:rPr lang="en-GB" dirty="0"/>
+              <a:t> </a:t>
+            </a:r>
+            <a:endParaRPr lang="en-GB" dirty="0" smtClean="0"/>
+          </a:p>
+          <a:p>
+            <a:pPr marL="27940" lvl="0" indent="0">
+              <a:buNone/>
+            </a:pPr>
+            <a:endParaRPr lang="en-GB" dirty="0"/>
+          </a:p>
+          <a:p>
+            <a:pPr marL="27940" lvl="0" indent="0">
+              <a:buNone/>
+            </a:pPr>
+            <a:r>
+              <a:rPr lang="en-GB" u="sng" dirty="0" err="1">
+                <a:hlinkClick r:id="rId7"/>
+              </a:rPr>
+              <a:t>config</a:t>
+            </a:r>
+            <a:r>
+              <a:rPr lang="en-GB" u="sng" dirty="0">
+                <a:hlinkClick r:id="rId7"/>
+              </a:rPr>
+              <a:t>/</a:t>
+            </a:r>
+            <a:r>
+              <a:rPr lang="en-GB" u="sng" dirty="0" err="1">
+                <a:hlinkClick r:id="rId7"/>
+              </a:rPr>
+              <a:t>risk_weights.yaml</a:t>
+            </a:r>
+            <a:r>
+              <a:rPr lang="en-GB" dirty="0"/>
+              <a:t> </a:t>
+            </a:r>
+          </a:p>
+          <a:p>
+            <a:pPr marL="27940" lvl="0" indent="0">
+              <a:buNone/>
+            </a:pPr>
             <a:endParaRPr dirty="0"/>
           </a:p>
         </p:txBody>
@@ -21102,17 +21472,12 @@
             </a:r>
             <a:r>
               <a:rPr lang="en" b="1" dirty="0"/>
-              <a:t>ate</a:t>
-            </a:r>
-            <a:r>
-              <a:rPr lang="en" b="1" dirty="0"/>
-              <a:t>: </a:t>
+              <a:t>ate: </a:t>
             </a:r>
             <a:r>
               <a:rPr lang="en" dirty="0"/>
               <a:t>13/05/2026</a:t>
             </a:r>
-            <a:endParaRPr lang="en" dirty="0"/>
           </a:p>
           <a:p>
             <a:pPr marL="182880" lvl="0" indent="-154940" algn="l" rtl="0">
@@ -21583,29 +21948,129 @@
             <a:pPr marL="27940" lvl="0" indent="0">
               <a:buNone/>
             </a:pPr>
+            <a:endParaRPr lang="en-GB" dirty="0"/>
+          </a:p>
+          <a:p>
+            <a:pPr marL="27940" lvl="0" indent="0">
+              <a:buNone/>
+            </a:pPr>
+            <a:r>
+              <a:rPr lang="en-GB" u="sng" dirty="0">
+                <a:hlinkClick r:id="rId3"/>
+              </a:rPr>
+              <a:t>app.py</a:t>
+            </a:r>
+            <a:r>
+              <a:rPr lang="en-GB" dirty="0"/>
+              <a:t> </a:t>
+            </a:r>
             <a:endParaRPr lang="en-GB" dirty="0" smtClean="0"/>
           </a:p>
           <a:p>
             <a:pPr marL="27940" lvl="0" indent="0">
               <a:buNone/>
             </a:pPr>
-            <a:r>
-              <a:rPr lang="en-GB" dirty="0" smtClean="0"/>
-              <a:t>app.py</a:t>
+            <a:endParaRPr lang="en-GB" dirty="0"/>
+          </a:p>
+          <a:p>
+            <a:pPr marL="27940" lvl="0" indent="0">
+              <a:buNone/>
+            </a:pPr>
+            <a:r>
+              <a:rPr lang="en-GB" u="sng" dirty="0">
+                <a:hlinkClick r:id="rId4"/>
+              </a:rPr>
+              <a:t>pages/2_Upload_Detect.py</a:t>
             </a:r>
             <a:r>
               <a:rPr lang="en-GB" dirty="0"/>
-              <a:t>, pages/, </a:t>
-            </a:r>
-            <a:r>
-              <a:rPr lang="en-GB" dirty="0" err="1"/>
-              <a:t>src</a:t>
+              <a:t> </a:t>
+            </a:r>
+            <a:endParaRPr lang="en-GB" dirty="0" smtClean="0"/>
+          </a:p>
+          <a:p>
+            <a:pPr marL="27940" lvl="0" indent="0">
+              <a:buNone/>
+            </a:pPr>
+            <a:endParaRPr lang="en-GB" dirty="0"/>
+          </a:p>
+          <a:p>
+            <a:pPr marL="27940" lvl="0" indent="0">
+              <a:buNone/>
+            </a:pPr>
+            <a:r>
+              <a:rPr lang="en-GB" u="sng" dirty="0">
+                <a:hlinkClick r:id="rId5"/>
+              </a:rPr>
+              <a:t>src/app/database.py</a:t>
             </a:r>
             <a:r>
               <a:rPr lang="en-GB" dirty="0"/>
-              <a:t>/app/database.py; first full walkthrough, upload to route comparison.</a:t>
-            </a:r>
-            <a:endParaRPr dirty="0"/>
+              <a:t> </a:t>
+            </a:r>
+            <a:endParaRPr lang="en-GB" dirty="0" smtClean="0"/>
+          </a:p>
+          <a:p>
+            <a:pPr marL="27940" lvl="0" indent="0">
+              <a:buNone/>
+            </a:pPr>
+            <a:endParaRPr lang="en-GB" dirty="0"/>
+          </a:p>
+          <a:p>
+            <a:pPr marL="27940" lvl="0" indent="0">
+              <a:buNone/>
+            </a:pPr>
+            <a:r>
+              <a:rPr lang="en-GB" u="sng" dirty="0">
+                <a:hlinkClick r:id="rId6"/>
+              </a:rPr>
+              <a:t>pages/1_Dashboard.py</a:t>
+            </a:r>
+            <a:r>
+              <a:rPr lang="en-GB" dirty="0"/>
+              <a:t> </a:t>
+            </a:r>
+            <a:endParaRPr lang="en-GB" dirty="0" smtClean="0"/>
+          </a:p>
+          <a:p>
+            <a:pPr marL="27940" lvl="0" indent="0">
+              <a:buNone/>
+            </a:pPr>
+            <a:endParaRPr lang="en-GB" dirty="0"/>
+          </a:p>
+          <a:p>
+            <a:pPr marL="27940" lvl="0" indent="0">
+              <a:buNone/>
+            </a:pPr>
+            <a:r>
+              <a:rPr lang="en-GB" u="sng" dirty="0" smtClean="0">
+                <a:hlinkClick r:id="rId7"/>
+              </a:rPr>
+              <a:t>pages/3_Damage_Map.py</a:t>
+            </a:r>
+            <a:endParaRPr lang="en-GB" u="sng" dirty="0" smtClean="0"/>
+          </a:p>
+          <a:p>
+            <a:pPr marL="27940" lvl="0" indent="0">
+              <a:buNone/>
+            </a:pPr>
+            <a:endParaRPr lang="en-GB" u="sng" dirty="0"/>
+          </a:p>
+          <a:p>
+            <a:pPr marL="27940" lvl="0" indent="0">
+              <a:buNone/>
+            </a:pPr>
+            <a:r>
+              <a:rPr lang="en-GB" u="sng" dirty="0">
+                <a:hlinkClick r:id="rId8"/>
+              </a:rPr>
+              <a:t>pages/4_Safer_Route_Planner.py</a:t>
+            </a:r>
+            <a:r>
+              <a:rPr lang="en-GB" dirty="0"/>
+              <a:t>  </a:t>
+            </a:r>
+            <a:endParaRPr lang="en-GB" dirty="0" smtClean="0"/>
           </a:p>
         </p:txBody>
       </p:sp>
@@ -22376,17 +22841,12 @@
             </a:r>
             <a:r>
               <a:rPr lang="en" b="1" dirty="0"/>
-              <a:t>ate</a:t>
-            </a:r>
-            <a:r>
-              <a:rPr lang="en" b="1" dirty="0"/>
-              <a:t>: </a:t>
+              <a:t>ate: </a:t>
             </a:r>
             <a:r>
               <a:rPr lang="en" dirty="0"/>
               <a:t>22/05/2026</a:t>
             </a:r>
-            <a:endParaRPr lang="en" dirty="0"/>
           </a:p>
           <a:p>
             <a:pPr marL="182880" lvl="0" indent="-154940" algn="l" rtl="0">
@@ -22449,11 +22909,7 @@
             </a:r>
             <a:r>
               <a:rPr lang="en-GB" dirty="0" smtClean="0"/>
-              <a:t>F</a:t>
-            </a:r>
-            <a:r>
-              <a:rPr lang="en-GB" dirty="0" smtClean="0"/>
-              <a:t>irst </a:t>
+              <a:t>First </a:t>
             </a:r>
             <a:r>
               <a:rPr lang="en-GB" dirty="0"/>
@@ -22469,11 +22925,7 @@
             </a:r>
             <a:r>
               <a:rPr lang="en-GB" dirty="0" smtClean="0"/>
-              <a:t>S</a:t>
-            </a:r>
-            <a:r>
-              <a:rPr lang="en-GB" dirty="0" smtClean="0"/>
-              <a:t>hifted </a:t>
+              <a:t>Shifted </a:t>
             </a:r>
             <a:r>
               <a:rPr lang="en-GB" dirty="0"/>
@@ -22858,7 +23310,7 @@
             </a:r>
           </a:p>
           <a:p>
-            <a:pPr marL="182880" lvl="0" indent="-154940" algn="l" rtl="0">
+            <a:pPr marL="27940" lvl="0" indent="0" algn="l" rtl="0">
               <a:spcBef>
                 <a:spcPts val="0"/>
               </a:spcBef>
@@ -22866,7 +23318,20 @@
                 <a:spcPts val="0"/>
               </a:spcAft>
               <a:buSzPts val="1000"/>
-              <a:buChar char="●"/>
+              <a:buNone/>
+            </a:pPr>
+            <a:endParaRPr lang="en" dirty="0" smtClean="0"/>
+          </a:p>
+          <a:p>
+            <a:pPr marL="27940" lvl="0" indent="0" algn="l" rtl="0">
+              <a:spcBef>
+                <a:spcPts val="0"/>
+              </a:spcBef>
+              <a:spcAft>
+                <a:spcPts val="0"/>
+              </a:spcAft>
+              <a:buSzPts val="1000"/>
+              <a:buNone/>
             </a:pPr>
             <a:endParaRPr lang="en" dirty="0"/>
           </a:p>
@@ -22875,10 +23340,103 @@
               <a:buNone/>
             </a:pPr>
             <a:r>
+              <a:rPr lang="en-GB" u="sng" dirty="0">
+                <a:hlinkClick r:id="rId3"/>
+              </a:rPr>
+              <a:t>Classes visual inspection</a:t>
+            </a:r>
+            <a:r>
               <a:rPr lang="en-GB" dirty="0"/>
-              <a:t>bias audit in notebooks/; data/processed/medium/; evaluation in outputs/reports/.</a:t>
-            </a:r>
-            <a:endParaRPr dirty="0"/>
+              <a:t> </a:t>
+            </a:r>
+            <a:endParaRPr lang="en-GB" dirty="0" smtClean="0"/>
+          </a:p>
+          <a:p>
+            <a:pPr marL="27940" lvl="0" indent="0">
+              <a:buNone/>
+            </a:pPr>
+            <a:endParaRPr lang="en-GB" dirty="0"/>
+          </a:p>
+          <a:p>
+            <a:pPr marL="27940" lvl="0" indent="0">
+              <a:buNone/>
+            </a:pPr>
+            <a:r>
+              <a:rPr lang="en-GB" u="sng" dirty="0">
+                <a:hlinkClick r:id="rId4"/>
+              </a:rPr>
+              <a:t>data</a:t>
+            </a:r>
+            <a:r>
+              <a:rPr lang="en-GB" dirty="0"/>
+              <a:t> </a:t>
+            </a:r>
+          </a:p>
+          <a:p>
+            <a:pPr marL="27940" lvl="0" indent="0">
+              <a:buNone/>
+            </a:pPr>
+            <a:endParaRPr lang="en-GB" dirty="0" smtClean="0"/>
+          </a:p>
+          <a:p>
+            <a:pPr marL="27940" lvl="0" indent="0">
+              <a:buNone/>
+            </a:pPr>
+            <a:r>
+              <a:rPr lang="en-GB" u="sng" dirty="0" err="1">
+                <a:hlinkClick r:id="rId5"/>
+              </a:rPr>
+              <a:t>Yolo_medium_data_train</a:t>
+            </a:r>
+            <a:r>
+              <a:rPr lang="en-GB" dirty="0"/>
+              <a:t> </a:t>
+            </a:r>
+            <a:endParaRPr lang="en-GB" dirty="0" smtClean="0"/>
+          </a:p>
+          <a:p>
+            <a:pPr marL="27940" lvl="0" indent="0">
+              <a:buNone/>
+            </a:pPr>
+            <a:endParaRPr lang="en-GB" dirty="0"/>
+          </a:p>
+          <a:p>
+            <a:pPr marL="27940" lvl="0" indent="0">
+              <a:buNone/>
+            </a:pPr>
+            <a:r>
+              <a:rPr lang="en-GB" u="sng" dirty="0" err="1">
+                <a:hlinkClick r:id="rId6"/>
+              </a:rPr>
+              <a:t>Fasterrcnn_medium_dataset_train</a:t>
+            </a:r>
+            <a:r>
+              <a:rPr lang="en-GB" dirty="0"/>
+              <a:t> </a:t>
+            </a:r>
+            <a:endParaRPr lang="en-GB" dirty="0" smtClean="0"/>
+          </a:p>
+          <a:p>
+            <a:pPr marL="27940" lvl="0" indent="0">
+              <a:buNone/>
+            </a:pPr>
+            <a:endParaRPr lang="en-GB" dirty="0"/>
+          </a:p>
+          <a:p>
+            <a:pPr marL="27940" lvl="0" indent="0">
+              <a:buNone/>
+            </a:pPr>
+            <a:r>
+              <a:rPr lang="en-GB" u="sng" dirty="0">
+                <a:hlinkClick r:id="rId7"/>
+              </a:rPr>
+              <a:t>Evaluation images in notebooks, and saved in the notebooks/ folder</a:t>
+            </a:r>
+            <a:r>
+              <a:rPr lang="en-GB" dirty="0"/>
+              <a:t> </a:t>
+            </a:r>
+            <a:endParaRPr lang="en-GB" dirty="0" smtClean="0"/>
           </a:p>
         </p:txBody>
       </p:sp>
@@ -23400,17 +23958,12 @@
             </a:r>
             <a:r>
               <a:rPr lang="en" b="1" dirty="0"/>
-              <a:t>ate</a:t>
-            </a:r>
-            <a:r>
-              <a:rPr lang="en" b="1" dirty="0"/>
-              <a:t>: </a:t>
+              <a:t>ate: </a:t>
             </a:r>
             <a:r>
               <a:rPr lang="en" dirty="0"/>
               <a:t>27/05/2026</a:t>
             </a:r>
-            <a:endParaRPr lang="en" dirty="0"/>
           </a:p>
           <a:p>
             <a:pPr marL="182880" lvl="0" indent="-154940" algn="l" rtl="0">
@@ -23461,11 +24014,7 @@
             </a:r>
             <a:r>
               <a:rPr lang="en-GB" dirty="0" smtClean="0"/>
-              <a:t>D</a:t>
-            </a:r>
-            <a:r>
-              <a:rPr lang="en-GB" dirty="0" smtClean="0"/>
-              <a:t>ataset </a:t>
+              <a:t>Dataset </a:t>
             </a:r>
             <a:r>
               <a:rPr lang="en-GB" dirty="0"/>
@@ -23868,6 +24417,19 @@
               <a:buSzPts val="1000"/>
               <a:buNone/>
             </a:pPr>
+            <a:endParaRPr lang="en" dirty="0" smtClean="0"/>
+          </a:p>
+          <a:p>
+            <a:pPr marL="27940" lvl="0" indent="0" algn="l" rtl="0">
+              <a:spcBef>
+                <a:spcPts val="0"/>
+              </a:spcBef>
+              <a:spcAft>
+                <a:spcPts val="0"/>
+              </a:spcAft>
+              <a:buSzPts val="1000"/>
+              <a:buNone/>
+            </a:pPr>
             <a:endParaRPr lang="en" dirty="0"/>
           </a:p>
           <a:p>
@@ -23875,10 +24437,60 @@
               <a:buNone/>
             </a:pPr>
             <a:r>
+              <a:rPr lang="en-GB" u="sng" dirty="0">
+                <a:hlinkClick r:id="rId3"/>
+              </a:rPr>
+              <a:t>scripts/create_rdd2022_4classes_large.py</a:t>
+            </a:r>
+            <a:r>
               <a:rPr lang="en-GB" dirty="0"/>
-              <a:t>balancing script + tests in scripts/; data/processed/large/; Table A.1.</a:t>
-            </a:r>
-            <a:endParaRPr lang="en" dirty="0" smtClean="0"/>
+              <a:t> </a:t>
+            </a:r>
+            <a:endParaRPr lang="en-GB" dirty="0" smtClean="0"/>
+          </a:p>
+          <a:p>
+            <a:pPr marL="27940" lvl="0" indent="0">
+              <a:buNone/>
+            </a:pPr>
+            <a:endParaRPr lang="en-GB" dirty="0"/>
+          </a:p>
+          <a:p>
+            <a:pPr marL="27940" lvl="0" indent="0">
+              <a:buNone/>
+            </a:pPr>
+            <a:r>
+              <a:rPr lang="en-GB" u="sng" dirty="0">
+                <a:hlinkClick r:id="rId4"/>
+              </a:rPr>
+              <a:t>data</a:t>
+            </a:r>
+            <a:r>
+              <a:rPr lang="en-GB" dirty="0"/>
+              <a:t> </a:t>
+            </a:r>
+            <a:endParaRPr lang="en-GB" dirty="0" smtClean="0"/>
+          </a:p>
+          <a:p>
+            <a:pPr marL="27940" lvl="0" indent="0">
+              <a:buNone/>
+            </a:pPr>
+            <a:endParaRPr lang="en-GB" dirty="0"/>
+          </a:p>
+          <a:p>
+            <a:pPr marL="27940" lvl="0" indent="0">
+              <a:buNone/>
+            </a:pPr>
+            <a:r>
+              <a:rPr lang="en-GB" u="sng" dirty="0">
+                <a:hlinkClick r:id="rId5"/>
+              </a:rPr>
+              <a:t>thesis Table A.1</a:t>
+            </a:r>
+            <a:r>
+              <a:rPr lang="en-GB" dirty="0"/>
+              <a:t> </a:t>
+            </a:r>
+            <a:endParaRPr lang="en" dirty="0"/>
           </a:p>
         </p:txBody>
       </p:sp>
@@ -24386,17 +24998,12 @@
             </a:r>
             <a:r>
               <a:rPr lang="en" b="1" dirty="0"/>
-              <a:t>ate</a:t>
-            </a:r>
-            <a:r>
-              <a:rPr lang="en" b="1" dirty="0"/>
-              <a:t>: </a:t>
+              <a:t>ate: </a:t>
             </a:r>
             <a:r>
               <a:rPr lang="en" dirty="0"/>
               <a:t>03/06/2026</a:t>
             </a:r>
-            <a:endParaRPr lang="en" dirty="0"/>
           </a:p>
           <a:p>
             <a:pPr marL="182880" lvl="0" indent="-154940" algn="l" rtl="0">
@@ -24858,6 +25465,19 @@
               <a:buSzPts val="1000"/>
               <a:buNone/>
             </a:pPr>
+            <a:endParaRPr lang="en" dirty="0" smtClean="0"/>
+          </a:p>
+          <a:p>
+            <a:pPr marL="27940" lvl="0" indent="0" algn="l" rtl="0">
+              <a:spcBef>
+                <a:spcPts val="0"/>
+              </a:spcBef>
+              <a:spcAft>
+                <a:spcPts val="0"/>
+              </a:spcAft>
+              <a:buSzPts val="1000"/>
+              <a:buNone/>
+            </a:pPr>
             <a:endParaRPr lang="en" dirty="0"/>
           </a:p>
           <a:p>
@@ -24865,18 +25485,50 @@
               <a:buNone/>
             </a:pPr>
             <a:r>
+              <a:rPr lang="en-GB" u="sng" dirty="0" err="1">
+                <a:hlinkClick r:id="rId3"/>
+              </a:rPr>
+              <a:t>YoLo_large_dataset_train</a:t>
+            </a:r>
+            <a:r>
               <a:rPr lang="en-GB" dirty="0"/>
-              <a:t>models/</a:t>
-            </a:r>
-            <a:r>
-              <a:rPr lang="en-GB" dirty="0" err="1"/>
-              <a:t>fasterrcnn_large</a:t>
-            </a:r>
-            <a:r>
-              <a:rPr lang="en-GB" dirty="0"/>
-              <a:t>/, runs/; full evaluation tables in outputs/reports/.</a:t>
-            </a:r>
-            <a:endParaRPr lang="en" dirty="0" smtClean="0"/>
+              <a:t> </a:t>
+            </a:r>
+            <a:endParaRPr lang="en-GB" dirty="0" smtClean="0"/>
+          </a:p>
+          <a:p>
+            <a:pPr marL="27940" lvl="0" indent="0">
+              <a:buNone/>
+            </a:pPr>
+            <a:endParaRPr lang="en-GB" dirty="0"/>
+          </a:p>
+          <a:p>
+            <a:pPr marL="27940" lvl="0" indent="0">
+              <a:buNone/>
+            </a:pPr>
+            <a:r>
+              <a:rPr lang="nb-NO" u="sng" dirty="0">
+                <a:hlinkClick r:id="rId4"/>
+              </a:rPr>
+              <a:t>Faster RNN large dataset train</a:t>
+            </a:r>
+            <a:r>
+              <a:rPr lang="nb-NO" dirty="0"/>
+              <a:t> </a:t>
+            </a:r>
+            <a:endParaRPr lang="nb-NO" dirty="0" smtClean="0"/>
+          </a:p>
+          <a:p>
+            <a:pPr marL="27940" lvl="0" indent="0">
+              <a:buNone/>
+            </a:pPr>
+            <a:endParaRPr lang="nb-NO" dirty="0"/>
+          </a:p>
+          <a:p>
+            <a:pPr marL="27940" lvl="0" indent="0">
+              <a:buNone/>
+            </a:pPr>
+            <a:endParaRPr lang="en" dirty="0"/>
           </a:p>
         </p:txBody>
       </p:sp>
@@ -25365,11 +26017,7 @@
             </a:r>
             <a:r>
               <a:rPr lang="en" b="1" dirty="0"/>
-              <a:t>ate</a:t>
-            </a:r>
-            <a:r>
-              <a:rPr lang="en" b="1" dirty="0"/>
-              <a:t>: </a:t>
+              <a:t>ate: </a:t>
             </a:r>
             <a:r>
               <a:rPr lang="en" dirty="0" smtClean="0"/>
@@ -25462,11 +26110,7 @@
             </a:r>
             <a:r>
               <a:rPr lang="en-GB" dirty="0" smtClean="0"/>
-              <a:t>D</a:t>
-            </a:r>
-            <a:r>
-              <a:rPr lang="en-GB" dirty="0" smtClean="0"/>
-              <a:t>ecided </a:t>
+              <a:t>Decided </a:t>
             </a:r>
             <a:r>
               <a:rPr lang="en-GB" dirty="0"/>
@@ -25848,6 +26492,19 @@
               <a:buSzPts val="1000"/>
               <a:buNone/>
             </a:pPr>
+            <a:endParaRPr lang="en" dirty="0" smtClean="0"/>
+          </a:p>
+          <a:p>
+            <a:pPr marL="27940" lvl="0" indent="0" algn="l" rtl="0">
+              <a:spcBef>
+                <a:spcPts val="0"/>
+              </a:spcBef>
+              <a:spcAft>
+                <a:spcPts val="0"/>
+              </a:spcAft>
+              <a:buSzPts val="1000"/>
+              <a:buNone/>
+            </a:pPr>
             <a:endParaRPr lang="en" dirty="0"/>
           </a:p>
           <a:p>
@@ -25855,14 +26512,126 @@
               <a:buNone/>
             </a:pPr>
             <a:r>
-              <a:rPr lang="en-GB" dirty="0" smtClean="0"/>
-              <a:t>statistical </a:t>
+              <a:rPr lang="en-GB" u="sng" dirty="0">
+                <a:hlinkClick r:id="rId3"/>
+              </a:rPr>
+              <a:t>thesis 5.4</a:t>
             </a:r>
             <a:r>
               <a:rPr lang="en-GB" dirty="0"/>
-              <a:t>results in outputs/reports/; thesis sections 4.1.3/5.1 draft.</a:t>
-            </a:r>
-            <a:endParaRPr dirty="0"/>
+              <a:t> </a:t>
+            </a:r>
+            <a:endParaRPr lang="en-GB" dirty="0" smtClean="0"/>
+          </a:p>
+          <a:p>
+            <a:pPr marL="27940" lvl="0" indent="0">
+              <a:buNone/>
+            </a:pPr>
+            <a:endParaRPr lang="en-GB" dirty="0"/>
+          </a:p>
+          <a:p>
+            <a:pPr marL="27940" lvl="0" indent="0">
+              <a:buNone/>
+            </a:pPr>
+            <a:r>
+              <a:rPr lang="en-GB" u="sng" dirty="0">
+                <a:hlinkClick r:id="rId4"/>
+              </a:rPr>
+              <a:t>outputs/reports/</a:t>
+            </a:r>
+            <a:r>
+              <a:rPr lang="en-GB" dirty="0"/>
+              <a:t> </a:t>
+            </a:r>
+            <a:endParaRPr lang="en-GB" dirty="0" smtClean="0"/>
+          </a:p>
+          <a:p>
+            <a:pPr marL="27940" lvl="0" indent="0">
+              <a:buNone/>
+            </a:pPr>
+            <a:endParaRPr lang="en-GB" dirty="0"/>
+          </a:p>
+          <a:p>
+            <a:pPr marL="27940" lvl="0" indent="0">
+              <a:buNone/>
+            </a:pPr>
+            <a:r>
+              <a:rPr lang="nb-NO" u="sng" dirty="0">
+                <a:hlinkClick r:id="rId5"/>
+              </a:rPr>
+              <a:t>Faster RNN large dataset train</a:t>
+            </a:r>
+            <a:r>
+              <a:rPr lang="nb-NO" dirty="0"/>
+              <a:t> </a:t>
+            </a:r>
+            <a:endParaRPr lang="nb-NO" dirty="0" smtClean="0"/>
+          </a:p>
+          <a:p>
+            <a:pPr marL="27940" lvl="0" indent="0">
+              <a:buNone/>
+            </a:pPr>
+            <a:endParaRPr lang="nb-NO" dirty="0"/>
+          </a:p>
+          <a:p>
+            <a:pPr marL="27940" lvl="0" indent="0">
+              <a:buNone/>
+            </a:pPr>
+            <a:r>
+              <a:rPr lang="en-GB" u="sng" dirty="0">
+                <a:hlinkClick r:id="rId3"/>
+              </a:rPr>
+              <a:t>thesis Table 2</a:t>
+            </a:r>
+            <a:r>
+              <a:rPr lang="en-GB" dirty="0"/>
+              <a:t> </a:t>
+            </a:r>
+            <a:endParaRPr lang="en-GB" dirty="0" smtClean="0"/>
+          </a:p>
+          <a:p>
+            <a:pPr marL="27940" lvl="0" indent="0">
+              <a:buNone/>
+            </a:pPr>
+            <a:endParaRPr lang="en-GB" dirty="0"/>
+          </a:p>
+          <a:p>
+            <a:pPr marL="27940" lvl="0" indent="0">
+              <a:buNone/>
+            </a:pPr>
+            <a:r>
+              <a:rPr lang="en-GB" u="sng" dirty="0">
+                <a:hlinkClick r:id="rId3"/>
+              </a:rPr>
+              <a:t>thesis figure 1</a:t>
+            </a:r>
+            <a:r>
+              <a:rPr lang="en-GB" dirty="0"/>
+              <a:t> </a:t>
+            </a:r>
+            <a:endParaRPr lang="en-GB" dirty="0" smtClean="0"/>
+          </a:p>
+          <a:p>
+            <a:pPr marL="27940" lvl="0" indent="0">
+              <a:buNone/>
+            </a:pPr>
+            <a:endParaRPr lang="en-GB" dirty="0"/>
+          </a:p>
+          <a:p>
+            <a:pPr marL="27940" lvl="0" indent="0">
+              <a:buNone/>
+            </a:pPr>
+            <a:r>
+              <a:rPr lang="en-GB" u="sng" dirty="0">
+                <a:hlinkClick r:id="rId3"/>
+              </a:rPr>
+              <a:t>thesis 4.1.3</a:t>
+            </a:r>
+            <a:r>
+              <a:rPr lang="en-GB" dirty="0"/>
+              <a:t> </a:t>
+            </a:r>
+            <a:endParaRPr lang="en" dirty="0"/>
           </a:p>
         </p:txBody>
       </p:sp>
@@ -26105,7 +26874,6 @@
               <a:rPr lang="en-GB" dirty="0"/>
               <a:t>start collecting the first manual Sofia dataset.</a:t>
             </a:r>
-            <a:endParaRPr lang="en-GB" dirty="0"/>
           </a:p>
         </p:txBody>
       </p:sp>
@@ -26463,11 +27231,7 @@
             </a:r>
             <a:r>
               <a:rPr lang="en-GB" dirty="0" smtClean="0"/>
-              <a:t>K</a:t>
-            </a:r>
-            <a:r>
-              <a:rPr lang="en-GB" dirty="0" smtClean="0"/>
-              <a:t>ept </a:t>
+              <a:t>Kept </a:t>
             </a:r>
             <a:r>
               <a:rPr lang="en-GB" dirty="0"/>
@@ -27666,25 +28430,84 @@
             <a:endParaRPr lang="en" dirty="0"/>
           </a:p>
           <a:p>
-            <a:pPr marL="27940" lvl="0" indent="0" algn="l" rtl="0">
-              <a:spcBef>
-                <a:spcPts val="0"/>
-              </a:spcBef>
-              <a:spcAft>
-                <a:spcPts val="0"/>
-              </a:spcAft>
-              <a:buSzPts val="1000"/>
-              <a:buNone/>
-            </a:pPr>
-            <a:endParaRPr lang="en" dirty="0" smtClean="0"/>
-          </a:p>
-          <a:p>
             <a:pPr marL="27940" lvl="0" indent="0">
               <a:buNone/>
             </a:pPr>
             <a:r>
+              <a:rPr lang="en-GB" u="sng" dirty="0">
+                <a:hlinkClick r:id="rId3"/>
+              </a:rPr>
+              <a:t>thesis 3.6</a:t>
+            </a:r>
+            <a:r>
               <a:rPr lang="en-GB" dirty="0"/>
-              <a:t>data/manual/images/ and first annotated batches in data/manual/labels/.</a:t>
+              <a:t> </a:t>
+            </a:r>
+            <a:endParaRPr lang="en-GB" dirty="0" smtClean="0"/>
+          </a:p>
+          <a:p>
+            <a:pPr marL="27940" lvl="0" indent="0">
+              <a:buNone/>
+            </a:pPr>
+            <a:endParaRPr lang="en-GB" dirty="0"/>
+          </a:p>
+          <a:p>
+            <a:pPr marL="27940" lvl="0" indent="0">
+              <a:buNone/>
+            </a:pPr>
+            <a:r>
+              <a:rPr lang="en-GB" u="sng" dirty="0">
+                <a:hlinkClick r:id="rId4"/>
+              </a:rPr>
+              <a:t>data/manual/</a:t>
+            </a:r>
+            <a:r>
+              <a:rPr lang="en-GB" dirty="0"/>
+              <a:t> </a:t>
+            </a:r>
+            <a:endParaRPr lang="en-GB" dirty="0" smtClean="0"/>
+          </a:p>
+          <a:p>
+            <a:pPr marL="27940" lvl="0" indent="0">
+              <a:buNone/>
+            </a:pPr>
+            <a:endParaRPr lang="en-GB" dirty="0"/>
+          </a:p>
+          <a:p>
+            <a:pPr marL="27940" lvl="0" indent="0">
+              <a:buNone/>
+            </a:pPr>
+            <a:r>
+              <a:rPr lang="en-GB" u="sng" dirty="0">
+                <a:hlinkClick r:id="rId5"/>
+              </a:rPr>
+              <a:t>data/manual/images/</a:t>
+            </a:r>
+            <a:r>
+              <a:rPr lang="en-GB" dirty="0"/>
+              <a:t> </a:t>
+            </a:r>
+            <a:endParaRPr lang="en-GB" dirty="0" smtClean="0"/>
+          </a:p>
+          <a:p>
+            <a:pPr marL="27940" lvl="0" indent="0">
+              <a:buNone/>
+            </a:pPr>
+            <a:endParaRPr lang="en-GB" dirty="0"/>
+          </a:p>
+          <a:p>
+            <a:pPr marL="27940" lvl="0" indent="0">
+              <a:buNone/>
+            </a:pPr>
+            <a:r>
+              <a:rPr lang="en-GB" u="sng" dirty="0">
+                <a:hlinkClick r:id="rId6"/>
+              </a:rPr>
+              <a:t>data/manual/labels/</a:t>
+            </a:r>
+            <a:r>
+              <a:rPr lang="en-GB" dirty="0"/>
+              <a:t> </a:t>
             </a:r>
             <a:endParaRPr lang="en" dirty="0" smtClean="0"/>
           </a:p>
@@ -28206,17 +29029,12 @@
             </a:r>
             <a:r>
               <a:rPr lang="en" b="1" dirty="0"/>
-              <a:t>ate</a:t>
-            </a:r>
-            <a:r>
-              <a:rPr lang="en" b="1" dirty="0"/>
-              <a:t>: </a:t>
+              <a:t>ate: </a:t>
             </a:r>
             <a:r>
               <a:rPr lang="en" dirty="0"/>
               <a:t>01/07/2026</a:t>
             </a:r>
-            <a:endParaRPr lang="en" dirty="0"/>
           </a:p>
           <a:p>
             <a:pPr marL="182880" lvl="0" indent="-154940" algn="l" rtl="0">
@@ -28283,11 +29101,7 @@
             </a:r>
             <a:r>
               <a:rPr lang="en-GB" dirty="0" smtClean="0"/>
-              <a:t>M</a:t>
-            </a:r>
-            <a:r>
-              <a:rPr lang="en-GB" dirty="0" smtClean="0"/>
-              <a:t>anual </a:t>
+              <a:t>Manual </a:t>
             </a:r>
             <a:r>
               <a:rPr lang="en-GB" dirty="0"/>
@@ -28303,11 +29117,7 @@
             </a:r>
             <a:r>
               <a:rPr lang="en-GB" dirty="0" smtClean="0"/>
-              <a:t>D</a:t>
-            </a:r>
-            <a:r>
-              <a:rPr lang="en-GB" dirty="0" smtClean="0"/>
-              <a:t>ocumented </a:t>
+              <a:t>Documented </a:t>
             </a:r>
             <a:r>
               <a:rPr lang="en-GB" dirty="0"/>
@@ -28572,8 +29382,8 @@
         </p:nvSpPr>
         <p:spPr>
           <a:xfrm>
-            <a:off x="182875" y="1152697"/>
-            <a:ext cx="4294500" cy="3812400"/>
+            <a:off x="182875" y="1152696"/>
+            <a:ext cx="4294500" cy="3896381"/>
           </a:xfrm>
           <a:prstGeom prst="rect">
             <a:avLst/>
@@ -28688,48 +29498,164 @@
             </a:r>
           </a:p>
           <a:p>
-            <a:pPr marL="27940" lvl="0" indent="0" algn="l" rtl="0">
-              <a:spcBef>
-                <a:spcPts val="0"/>
-              </a:spcBef>
-              <a:spcAft>
-                <a:spcPts val="0"/>
-              </a:spcAft>
-              <a:buSzPts val="1000"/>
-              <a:buNone/>
-            </a:pPr>
+            <a:pPr marL="27940" lvl="0" indent="0">
+              <a:buNone/>
+            </a:pPr>
+            <a:r>
+              <a:rPr lang="en-GB" u="sng" dirty="0">
+                <a:hlinkClick r:id="rId3"/>
+              </a:rPr>
+              <a:t>data/manual/labels/</a:t>
+            </a:r>
+            <a:r>
+              <a:rPr lang="en-GB" dirty="0"/>
+              <a:t> </a:t>
+            </a:r>
+            <a:endParaRPr lang="en-GB" dirty="0" smtClean="0"/>
+          </a:p>
+          <a:p>
+            <a:pPr marL="27940" lvl="0" indent="0">
+              <a:buNone/>
+            </a:pPr>
+            <a:endParaRPr lang="en-GB" dirty="0"/>
+          </a:p>
+          <a:p>
+            <a:pPr marL="27940" lvl="0" indent="0">
+              <a:buNone/>
+            </a:pPr>
+            <a:r>
+              <a:rPr lang="en-GB" u="sng" dirty="0">
+                <a:hlinkClick r:id="rId4"/>
+              </a:rPr>
+              <a:t>thesis 3.6</a:t>
+            </a:r>
+            <a:r>
+              <a:rPr lang="en-GB" dirty="0"/>
+              <a:t> </a:t>
+            </a:r>
+            <a:endParaRPr lang="en-GB" dirty="0" smtClean="0"/>
+          </a:p>
+          <a:p>
+            <a:pPr marL="27940" lvl="0" indent="0">
+              <a:buNone/>
+            </a:pPr>
+            <a:endParaRPr lang="en-GB" dirty="0"/>
+          </a:p>
+          <a:p>
+            <a:pPr marL="27940" lvl="0" indent="0">
+              <a:buNone/>
+            </a:pPr>
+            <a:r>
+              <a:rPr lang="en-GB" u="sng" dirty="0">
+                <a:hlinkClick r:id="rId4"/>
+              </a:rPr>
+              <a:t>thesis Table: Sofia split</a:t>
+            </a:r>
+            <a:r>
+              <a:rPr lang="en-GB" dirty="0"/>
+              <a:t> </a:t>
+            </a:r>
+            <a:endParaRPr lang="en-GB" dirty="0" smtClean="0"/>
+          </a:p>
+          <a:p>
+            <a:pPr marL="27940" lvl="0" indent="0">
+              <a:buNone/>
+            </a:pPr>
+            <a:endParaRPr lang="en-GB" dirty="0"/>
+          </a:p>
+          <a:p>
+            <a:pPr marL="27940" lvl="0" indent="0">
+              <a:buNone/>
+            </a:pPr>
+            <a:r>
+              <a:rPr lang="en-GB" u="sng" dirty="0">
+                <a:hlinkClick r:id="rId5"/>
+              </a:rPr>
+              <a:t>outputs/reports/</a:t>
+            </a:r>
+            <a:r>
+              <a:rPr lang="en-GB" dirty="0"/>
+              <a:t> </a:t>
+            </a:r>
+            <a:endParaRPr lang="en-GB" dirty="0" smtClean="0"/>
+          </a:p>
+          <a:p>
+            <a:pPr marL="27940" lvl="0" indent="0">
+              <a:buNone/>
+            </a:pPr>
+            <a:endParaRPr lang="en-GB" dirty="0"/>
+          </a:p>
+          <a:p>
+            <a:pPr marL="27940" lvl="0" indent="0">
+              <a:buNone/>
+            </a:pPr>
+            <a:r>
+              <a:rPr lang="en-GB" u="sng" dirty="0">
+                <a:hlinkClick r:id="rId6"/>
+              </a:rPr>
+              <a:t>notebooks/</a:t>
+            </a:r>
+            <a:r>
+              <a:rPr lang="en-GB" dirty="0"/>
+              <a:t> </a:t>
+            </a:r>
+            <a:endParaRPr lang="en-GB" dirty="0" smtClean="0"/>
+          </a:p>
+          <a:p>
+            <a:pPr marL="27940" lvl="0" indent="0">
+              <a:buNone/>
+            </a:pPr>
+            <a:endParaRPr lang="en-GB" dirty="0"/>
+          </a:p>
+          <a:p>
+            <a:pPr marL="27940" lvl="0" indent="0">
+              <a:buNone/>
+            </a:pPr>
+            <a:r>
+              <a:rPr lang="en-GB" u="sng" dirty="0">
+                <a:hlinkClick r:id="rId7"/>
+              </a:rPr>
+              <a:t>models/yolov8n_sofia_finetune/</a:t>
+            </a:r>
+            <a:r>
+              <a:rPr lang="en-GB" dirty="0"/>
+              <a:t> </a:t>
+            </a:r>
+            <a:endParaRPr lang="en-GB" dirty="0" smtClean="0"/>
+          </a:p>
+          <a:p>
+            <a:pPr marL="27940" lvl="0" indent="0">
+              <a:buNone/>
+            </a:pPr>
+            <a:endParaRPr lang="en-GB" dirty="0" smtClean="0"/>
+          </a:p>
+          <a:p>
+            <a:pPr marL="27940" lvl="0" indent="0">
+              <a:buNone/>
+            </a:pPr>
+            <a:r>
+              <a:rPr lang="en-GB" u="sng" dirty="0">
+                <a:hlinkClick r:id="rId8"/>
+              </a:rPr>
+              <a:t>models/</a:t>
+            </a:r>
+            <a:r>
+              <a:rPr lang="en-GB" u="sng" dirty="0" err="1">
+                <a:hlinkClick r:id="rId8"/>
+              </a:rPr>
+              <a:t>fasterrcnn_sofia_finetune</a:t>
+            </a:r>
+            <a:r>
+              <a:rPr lang="en-GB" u="sng" dirty="0">
+                <a:hlinkClick r:id="rId8"/>
+              </a:rPr>
+              <a:t>/</a:t>
+            </a:r>
+            <a:r>
+              <a:rPr lang="en-GB" dirty="0"/>
+              <a:t> </a:t>
+            </a:r>
             <a:endParaRPr lang="en" dirty="0"/>
-          </a:p>
-          <a:p>
-            <a:pPr marL="27940" lvl="0" indent="0" algn="l" rtl="0">
-              <a:spcBef>
-                <a:spcPts val="0"/>
-              </a:spcBef>
-              <a:spcAft>
-                <a:spcPts val="0"/>
-              </a:spcAft>
-              <a:buSzPts val="1000"/>
-              <a:buNone/>
-            </a:pPr>
-            <a:endParaRPr lang="en" dirty="0" smtClean="0"/>
-          </a:p>
-          <a:p>
-            <a:pPr marL="27940" lvl="0" indent="0">
-              <a:buNone/>
-            </a:pPr>
-            <a:r>
-              <a:rPr lang="en-GB" dirty="0"/>
-              <a:t>thesis Table: Sofia split; models/yolov8n_sofia_finetune/, models/</a:t>
-            </a:r>
-            <a:r>
-              <a:rPr lang="en-GB" dirty="0" err="1"/>
-              <a:t>fasterrcnn_sofia_finetune</a:t>
-            </a:r>
-            <a:r>
-              <a:rPr lang="en-GB" dirty="0"/>
-              <a:t>/; before/after results in thesis 5.2.</a:t>
-            </a:r>
-            <a:endParaRPr dirty="0"/>
           </a:p>
         </p:txBody>
       </p:sp>
@@ -28820,7 +29746,6 @@
               <a:rPr lang="en" dirty="0"/>
               <a:t>What went well? </a:t>
             </a:r>
-            <a:endParaRPr lang="en" dirty="0"/>
           </a:p>
           <a:p>
             <a:pPr marL="27940" lvl="0" indent="0" algn="l" rtl="0">
@@ -29260,17 +30185,12 @@
             </a:r>
             <a:r>
               <a:rPr lang="en" b="1" dirty="0"/>
-              <a:t>ate</a:t>
-            </a:r>
-            <a:r>
-              <a:rPr lang="en" b="1" dirty="0"/>
-              <a:t>: </a:t>
+              <a:t>ate: </a:t>
             </a:r>
             <a:r>
               <a:rPr lang="en" dirty="0"/>
               <a:t>10/07/2026</a:t>
             </a:r>
-            <a:endParaRPr lang="en" dirty="0"/>
           </a:p>
           <a:p>
             <a:pPr marL="182880" lvl="0" indent="-154940" algn="l" rtl="0">
@@ -29329,11 +30249,7 @@
             </a:r>
             <a:r>
               <a:rPr lang="en-GB" dirty="0" smtClean="0"/>
-              <a:t>D</a:t>
-            </a:r>
-            <a:r>
-              <a:rPr lang="en-GB" dirty="0" smtClean="0"/>
-              <a:t>omain-adaptation </a:t>
+              <a:t>Domain-adaptation </a:t>
             </a:r>
             <a:r>
               <a:rPr lang="en-GB" dirty="0"/>
@@ -29349,11 +30265,7 @@
             </a:r>
             <a:r>
               <a:rPr lang="en-GB" dirty="0" smtClean="0"/>
-              <a:t>P</a:t>
-            </a:r>
-            <a:r>
-              <a:rPr lang="en-GB" dirty="0" smtClean="0"/>
-              <a:t>lanned </a:t>
+              <a:t>Planned </a:t>
             </a:r>
             <a:r>
               <a:rPr lang="en-GB" dirty="0"/>
@@ -29747,8 +30659,114 @@
               <a:buNone/>
             </a:pPr>
             <a:r>
+              <a:rPr lang="en-GB" u="sng" dirty="0" err="1">
+                <a:hlinkClick r:id="rId3"/>
+              </a:rPr>
+              <a:t>config</a:t>
+            </a:r>
+            <a:r>
+              <a:rPr lang="en-GB" u="sng" dirty="0">
+                <a:hlinkClick r:id="rId3"/>
+              </a:rPr>
+              <a:t>/</a:t>
+            </a:r>
+            <a:r>
+              <a:rPr lang="en-GB" u="sng" dirty="0" err="1">
+                <a:hlinkClick r:id="rId3"/>
+              </a:rPr>
+              <a:t>app_config.yaml</a:t>
+            </a:r>
+            <a:r>
               <a:rPr lang="en-GB" dirty="0"/>
-              <a:t>pages/3_Damage_Map.py, pages/4_Safer_Route_Planner.py; full walkthrough test.</a:t>
+              <a:t> </a:t>
+            </a:r>
+            <a:endParaRPr lang="en-GB" dirty="0" smtClean="0"/>
+          </a:p>
+          <a:p>
+            <a:pPr marL="27940" lvl="0" indent="0">
+              <a:buNone/>
+            </a:pPr>
+            <a:endParaRPr lang="en-GB" dirty="0"/>
+          </a:p>
+          <a:p>
+            <a:pPr marL="27940" lvl="0" indent="0">
+              <a:buNone/>
+            </a:pPr>
+            <a:r>
+              <a:rPr lang="en-GB" u="sng" dirty="0">
+                <a:hlinkClick r:id="rId4"/>
+              </a:rPr>
+              <a:t>pages/3_Damage_Map.py</a:t>
+            </a:r>
+            <a:r>
+              <a:rPr lang="en-GB" dirty="0"/>
+              <a:t> </a:t>
+            </a:r>
+            <a:endParaRPr lang="en-GB" dirty="0" smtClean="0"/>
+          </a:p>
+          <a:p>
+            <a:pPr marL="27940" lvl="0" indent="0">
+              <a:buNone/>
+            </a:pPr>
+            <a:endParaRPr lang="en-GB" dirty="0"/>
+          </a:p>
+          <a:p>
+            <a:pPr marL="27940" lvl="0" indent="0">
+              <a:buNone/>
+            </a:pPr>
+            <a:r>
+              <a:rPr lang="en-GB" u="sng" dirty="0">
+                <a:hlinkClick r:id="rId5"/>
+              </a:rPr>
+              <a:t>pages/4_Safer_Route_Planner.py</a:t>
+            </a:r>
+            <a:r>
+              <a:rPr lang="en-GB" dirty="0"/>
+              <a:t> </a:t>
+            </a:r>
+            <a:endParaRPr lang="en-GB" dirty="0" smtClean="0"/>
+          </a:p>
+          <a:p>
+            <a:pPr marL="27940" lvl="0" indent="0">
+              <a:buNone/>
+            </a:pPr>
+            <a:endParaRPr lang="en-GB" dirty="0"/>
+          </a:p>
+          <a:p>
+            <a:pPr marL="27940" lvl="0" indent="0">
+              <a:buNone/>
+            </a:pPr>
+            <a:r>
+              <a:rPr lang="en-GB" u="sng" dirty="0">
+                <a:hlinkClick r:id="rId6"/>
+              </a:rPr>
+              <a:t>src/app/database.py</a:t>
+            </a:r>
+            <a:r>
+              <a:rPr lang="en-GB" dirty="0"/>
+              <a:t> </a:t>
+            </a:r>
+            <a:endParaRPr lang="en-GB" dirty="0" smtClean="0"/>
+          </a:p>
+          <a:p>
+            <a:pPr marL="27940" lvl="0" indent="0">
+              <a:buNone/>
+            </a:pPr>
+            <a:endParaRPr lang="en-GB" dirty="0"/>
+          </a:p>
+          <a:p>
+            <a:pPr marL="27940" lvl="0" indent="0">
+              <a:buNone/>
+            </a:pPr>
+            <a:r>
+              <a:rPr lang="en-GB" u="sng" dirty="0">
+                <a:hlinkClick r:id="rId7"/>
+              </a:rPr>
+              <a:t>pages/1_Dashboard.py</a:t>
+            </a:r>
+            <a:r>
+              <a:rPr lang="en-GB" dirty="0"/>
+              <a:t> </a:t>
             </a:r>
             <a:endParaRPr lang="en" dirty="0" smtClean="0"/>
           </a:p>
@@ -30274,17 +31292,12 @@
             </a:r>
             <a:r>
               <a:rPr lang="en" b="1" dirty="0"/>
-              <a:t>ate</a:t>
-            </a:r>
-            <a:r>
-              <a:rPr lang="en" b="1" dirty="0"/>
-              <a:t>: </a:t>
+              <a:t>ate: </a:t>
             </a:r>
             <a:r>
               <a:rPr lang="en" dirty="0"/>
               <a:t>29/07/2026</a:t>
             </a:r>
-            <a:endParaRPr lang="en" dirty="0"/>
           </a:p>
           <a:p>
             <a:pPr marL="182880" lvl="0" indent="-154940"/>
@@ -30747,7 +31760,7 @@
             </a:r>
           </a:p>
           <a:p>
-            <a:pPr marL="182880" lvl="0" indent="-154940" algn="l" rtl="0">
+            <a:pPr marL="27940" lvl="0" indent="0" algn="l" rtl="0">
               <a:spcBef>
                 <a:spcPts val="0"/>
               </a:spcBef>
@@ -30755,27 +31768,141 @@
                 <a:spcPts val="0"/>
               </a:spcAft>
               <a:buSzPts val="1000"/>
-              <a:buChar char="●"/>
-            </a:pPr>
+              <a:buNone/>
+            </a:pPr>
+            <a:endParaRPr lang="en" dirty="0" smtClean="0"/>
+          </a:p>
+          <a:p>
+            <a:pPr marL="27940" lvl="0" indent="0">
+              <a:buNone/>
+            </a:pPr>
+            <a:r>
+              <a:rPr lang="en-GB" u="sng" dirty="0">
+                <a:hlinkClick r:id="rId3"/>
+              </a:rPr>
+              <a:t>thesis 3.6</a:t>
+            </a:r>
+            <a:r>
+              <a:rPr lang="en-GB" dirty="0"/>
+              <a:t> </a:t>
+            </a:r>
+            <a:endParaRPr lang="en-GB" dirty="0" smtClean="0"/>
+          </a:p>
+          <a:p>
+            <a:pPr marL="27940" lvl="0" indent="0">
+              <a:buNone/>
+            </a:pPr>
+            <a:endParaRPr lang="en-GB" dirty="0"/>
+          </a:p>
+          <a:p>
+            <a:pPr marL="27940" lvl="0" indent="0">
+              <a:buNone/>
+            </a:pPr>
+            <a:r>
+              <a:rPr lang="en-GB" u="sng" dirty="0">
+                <a:hlinkClick r:id="rId4"/>
+              </a:rPr>
+              <a:t>data/manual/</a:t>
+            </a:r>
+            <a:r>
+              <a:rPr lang="en-GB" dirty="0"/>
+              <a:t> </a:t>
+            </a:r>
+            <a:endParaRPr lang="en-GB" dirty="0" smtClean="0"/>
+          </a:p>
+          <a:p>
+            <a:pPr marL="27940" lvl="0" indent="0">
+              <a:buNone/>
+            </a:pPr>
+            <a:endParaRPr lang="en-GB" dirty="0"/>
+          </a:p>
+          <a:p>
+            <a:pPr marL="27940" lvl="0" indent="0">
+              <a:buNone/>
+            </a:pPr>
+            <a:r>
+              <a:rPr lang="en-GB" u="sng" dirty="0">
+                <a:hlinkClick r:id="rId5"/>
+              </a:rPr>
+              <a:t>outputs/geo/</a:t>
+            </a:r>
+            <a:r>
+              <a:rPr lang="en-GB" u="sng" dirty="0" err="1">
+                <a:hlinkClick r:id="rId5"/>
+              </a:rPr>
+              <a:t>route_comparison.json</a:t>
+            </a:r>
+            <a:r>
+              <a:rPr lang="en-GB" dirty="0"/>
+              <a:t> </a:t>
+            </a:r>
+            <a:endParaRPr lang="en-GB" dirty="0" smtClean="0"/>
+          </a:p>
+          <a:p>
+            <a:pPr marL="27940" lvl="0" indent="0">
+              <a:buNone/>
+            </a:pPr>
+            <a:endParaRPr lang="en-GB" dirty="0"/>
+          </a:p>
+          <a:p>
+            <a:pPr marL="27940" lvl="0" indent="0">
+              <a:buNone/>
+            </a:pPr>
+            <a:r>
+              <a:rPr lang="en-GB" u="sng" dirty="0">
+                <a:hlinkClick r:id="rId3"/>
+              </a:rPr>
+              <a:t>thesis 4.1.3</a:t>
+            </a:r>
+            <a:r>
+              <a:rPr lang="en-GB" dirty="0"/>
+              <a:t> </a:t>
+            </a:r>
+            <a:endParaRPr lang="en-GB" dirty="0" smtClean="0"/>
+          </a:p>
+          <a:p>
+            <a:pPr marL="27940" lvl="0" indent="0">
+              <a:buNone/>
+            </a:pPr>
+            <a:endParaRPr lang="en-GB" dirty="0"/>
+          </a:p>
+          <a:p>
+            <a:pPr marL="27940" lvl="0" indent="0">
+              <a:buNone/>
+            </a:pPr>
+            <a:r>
+              <a:rPr lang="en-GB" u="sng" dirty="0">
+                <a:hlinkClick r:id="rId4"/>
+              </a:rPr>
+              <a:t>data/manual/</a:t>
+            </a:r>
+            <a:r>
+              <a:rPr lang="en-GB" dirty="0"/>
+              <a:t> </a:t>
+            </a:r>
+            <a:endParaRPr lang="en-GB" dirty="0" smtClean="0"/>
+          </a:p>
+          <a:p>
+            <a:pPr marL="27940" lvl="0" indent="0">
+              <a:buNone/>
+            </a:pPr>
+            <a:endParaRPr lang="en-GB" dirty="0"/>
+          </a:p>
+          <a:p>
+            <a:pPr marL="27940" lvl="0" indent="0">
+              <a:buNone/>
+            </a:pPr>
+            <a:r>
+              <a:rPr lang="en-GB" u="sng" dirty="0">
+                <a:hlinkClick r:id="rId6"/>
+              </a:rPr>
+              <a:t>outputs/geo/segment_risk.csv</a:t>
+            </a:r>
+            <a:r>
+              <a:rPr lang="en-GB" dirty="0"/>
+              <a:t> </a:t>
+            </a:r>
             <a:endParaRPr lang="en" dirty="0"/>
-          </a:p>
-          <a:p>
-            <a:pPr marL="27940" lvl="0" indent="0">
-              <a:buNone/>
-            </a:pPr>
-            <a:r>
-              <a:rPr lang="en-GB" dirty="0"/>
-              <a:t>geotagged photos in data/manual/; first (inconclusive) outputs/geo/</a:t>
-            </a:r>
-            <a:r>
-              <a:rPr lang="en-GB" dirty="0" err="1"/>
-              <a:t>route_comparison.json</a:t>
-            </a:r>
-            <a:r>
-              <a:rPr lang="en-GB" dirty="0"/>
-              <a:t>.</a:t>
-            </a:r>
-            <a:endParaRPr dirty="0"/>
           </a:p>
         </p:txBody>
       </p:sp>
@@ -30946,7 +32073,6 @@
               <a:rPr lang="en" dirty="0"/>
               <a:t>What did you learn? </a:t>
             </a:r>
-            <a:endParaRPr lang="en" dirty="0"/>
           </a:p>
           <a:p>
             <a:pPr marL="27940" lvl="0" indent="0">
@@ -31281,17 +32407,12 @@
             </a:r>
             <a:r>
               <a:rPr lang="en" b="1" dirty="0"/>
-              <a:t>ate</a:t>
-            </a:r>
-            <a:r>
-              <a:rPr lang="en" b="1" dirty="0"/>
-              <a:t>: </a:t>
+              <a:t>ate: </a:t>
             </a:r>
             <a:r>
               <a:rPr lang="en" dirty="0"/>
               <a:t>05/08/2026</a:t>
             </a:r>
-            <a:endParaRPr lang="en" dirty="0"/>
           </a:p>
           <a:p>
             <a:pPr marL="182880" lvl="0" indent="-154940"/>
@@ -31345,11 +32466,7 @@
             </a:r>
             <a:r>
               <a:rPr lang="en-GB" dirty="0" smtClean="0"/>
-              <a:t>F</a:t>
-            </a:r>
-            <a:r>
-              <a:rPr lang="en-GB" dirty="0" smtClean="0"/>
-              <a:t>irst </a:t>
+              <a:t>First </a:t>
             </a:r>
             <a:r>
               <a:rPr lang="en-GB" dirty="0"/>
@@ -31365,11 +32482,7 @@
             </a:r>
             <a:r>
               <a:rPr lang="en-GB" dirty="0" smtClean="0"/>
-              <a:t>R</a:t>
-            </a:r>
-            <a:r>
-              <a:rPr lang="en-GB" dirty="0" smtClean="0"/>
-              <a:t>estricted </a:t>
+              <a:t>Restricted </a:t>
             </a:r>
             <a:r>
               <a:rPr lang="en-GB" dirty="0"/>
@@ -31758,27 +32871,151 @@
             </a:r>
           </a:p>
           <a:p>
-            <a:pPr marL="27940" lvl="0" indent="0" algn="l" rtl="0">
-              <a:spcBef>
-                <a:spcPts val="0"/>
-              </a:spcBef>
-              <a:spcAft>
-                <a:spcPts val="0"/>
-              </a:spcAft>
-              <a:buSzPts val="1000"/>
+            <a:pPr marL="27940" lvl="0" indent="0">
+              <a:buNone/>
+            </a:pPr>
+            <a:r>
+              <a:rPr lang="en-GB" u="sng" dirty="0">
+                <a:hlinkClick r:id="rId3"/>
+              </a:rPr>
+              <a:t>outputs/geo/segment_risk.csv</a:t>
+            </a:r>
+            <a:r>
+              <a:rPr lang="en-GB" dirty="0"/>
+              <a:t> </a:t>
+            </a:r>
+            <a:endParaRPr lang="en-GB" dirty="0" smtClean="0"/>
+          </a:p>
+          <a:p>
+            <a:pPr marL="27940" lvl="0" indent="0">
+              <a:buNone/>
+            </a:pPr>
+            <a:endParaRPr lang="en-GB" dirty="0"/>
+          </a:p>
+          <a:p>
+            <a:pPr marL="27940" lvl="0" indent="0">
+              <a:buNone/>
+            </a:pPr>
+            <a:r>
+              <a:rPr lang="en-GB" u="sng" dirty="0">
+                <a:hlinkClick r:id="rId4"/>
+              </a:rPr>
+              <a:t>outputs/reports/</a:t>
+            </a:r>
+            <a:r>
+              <a:rPr lang="en-GB" dirty="0"/>
+              <a:t> </a:t>
+            </a:r>
+            <a:endParaRPr lang="en-GB" dirty="0" smtClean="0"/>
+          </a:p>
+          <a:p>
+            <a:pPr marL="27940" lvl="0" indent="0">
+              <a:buNone/>
+            </a:pPr>
+            <a:endParaRPr lang="en-GB" dirty="0"/>
+          </a:p>
+          <a:p>
+            <a:pPr marL="27940" lvl="0" indent="0">
+              <a:buNone/>
+            </a:pPr>
+            <a:r>
+              <a:rPr lang="en-GB" u="sng" dirty="0">
+                <a:hlinkClick r:id="rId5"/>
+              </a:rPr>
+              <a:t>outputs/reports/h4_evaluation_results.csv</a:t>
+            </a:r>
+            <a:r>
+              <a:rPr lang="en-GB" dirty="0"/>
+              <a:t> </a:t>
+            </a:r>
+            <a:endParaRPr lang="en-GB" dirty="0" smtClean="0"/>
+          </a:p>
+          <a:p>
+            <a:pPr marL="27940" lvl="0" indent="0">
+              <a:buNone/>
+            </a:pPr>
+            <a:endParaRPr lang="en-GB" dirty="0"/>
+          </a:p>
+          <a:p>
+            <a:pPr marL="27940" lvl="0" indent="0">
+              <a:buNone/>
+            </a:pPr>
+            <a:r>
+              <a:rPr lang="en-GB" u="sng" dirty="0">
+                <a:hlinkClick r:id="rId6"/>
+              </a:rPr>
+              <a:t>H4 evaluation</a:t>
+            </a:r>
+            <a:r>
+              <a:rPr lang="en-GB" dirty="0"/>
+              <a:t> </a:t>
+            </a:r>
+            <a:endParaRPr lang="en-GB" dirty="0" smtClean="0"/>
+          </a:p>
+          <a:p>
+            <a:pPr marL="27940" lvl="0" indent="0">
+              <a:buNone/>
+            </a:pPr>
+            <a:endParaRPr lang="en-GB" dirty="0"/>
+          </a:p>
+          <a:p>
+            <a:pPr marL="27940" lvl="0" indent="0">
+              <a:buNone/>
+            </a:pPr>
+            <a:r>
+              <a:rPr lang="en-GB" u="sng" dirty="0">
+                <a:hlinkClick r:id="rId7"/>
+              </a:rPr>
+              <a:t>outputs/reports/h2_confusion_matrix.png</a:t>
+            </a:r>
+            <a:r>
+              <a:rPr lang="en-GB" dirty="0"/>
+              <a:t> </a:t>
+            </a:r>
+            <a:endParaRPr lang="en-GB" dirty="0" smtClean="0"/>
+          </a:p>
+          <a:p>
+            <a:pPr marL="27940" lvl="0" indent="0">
+              <a:buNone/>
+            </a:pPr>
+            <a:endParaRPr lang="en-GB" dirty="0"/>
+          </a:p>
+          <a:p>
+            <a:pPr marL="27940" lvl="0" indent="0">
+              <a:buNone/>
+            </a:pPr>
+            <a:r>
+              <a:rPr lang="en-GB" u="sng" dirty="0">
+                <a:hlinkClick r:id="rId8"/>
+              </a:rPr>
+              <a:t>H2 evaluation</a:t>
+            </a:r>
+            <a:r>
+              <a:rPr lang="en-GB" dirty="0"/>
+              <a:t> </a:t>
+            </a:r>
+            <a:endParaRPr lang="en-GB" dirty="0" smtClean="0"/>
+          </a:p>
+          <a:p>
+            <a:pPr marL="27940" lvl="0" indent="0">
+              <a:buNone/>
+            </a:pPr>
+            <a:r>
+              <a:rPr lang="en-GB" u="sng" dirty="0">
+                <a:hlinkClick r:id="rId9"/>
+              </a:rPr>
+              <a:t>thesis 4.1</a:t>
+            </a:r>
+            <a:r>
+              <a:rPr lang="en-GB" dirty="0"/>
+              <a:t> </a:t>
+            </a:r>
+          </a:p>
+          <a:p>
+            <a:pPr marL="27940" lvl="0" indent="0">
               <a:buNone/>
             </a:pPr>
             <a:endParaRPr lang="en" dirty="0"/>
-          </a:p>
-          <a:p>
-            <a:pPr marL="27940" lvl="0" indent="0">
-              <a:buNone/>
-            </a:pPr>
-            <a:r>
-              <a:rPr lang="en-GB" dirty="0"/>
-              <a:t>outputs/reports/h4_evaluation_results.csv, h2_evaluation_results.csv, h2_confusion_matrix.png.</a:t>
-            </a:r>
-            <a:endParaRPr lang="en" dirty="0" smtClean="0"/>
           </a:p>
         </p:txBody>
       </p:sp>
@@ -32272,17 +33509,12 @@
             </a:r>
             <a:r>
               <a:rPr lang="en" b="1" dirty="0"/>
-              <a:t>ate</a:t>
-            </a:r>
-            <a:r>
-              <a:rPr lang="en" b="1" dirty="0"/>
-              <a:t>: </a:t>
+              <a:t>ate: </a:t>
             </a:r>
             <a:r>
               <a:rPr lang="en" dirty="0"/>
               <a:t>13/08/2026</a:t>
             </a:r>
-            <a:endParaRPr lang="en" dirty="0"/>
           </a:p>
           <a:p>
             <a:pPr marL="182880" lvl="0" indent="-154940"/>
@@ -32356,11 +33588,7 @@
             </a:r>
             <a:r>
               <a:rPr lang="en-GB" dirty="0" smtClean="0"/>
-              <a:t>B</a:t>
-            </a:r>
-            <a:r>
-              <a:rPr lang="en-GB" dirty="0" smtClean="0"/>
-              <a:t>uilt </a:t>
+              <a:t>Built </a:t>
             </a:r>
             <a:r>
               <a:rPr lang="en-GB" dirty="0"/>
@@ -32973,17 +34201,101 @@
               <a:buSzPts val="1000"/>
               <a:buNone/>
             </a:pPr>
+            <a:endParaRPr lang="en" dirty="0" smtClean="0"/>
+          </a:p>
+          <a:p>
+            <a:pPr marL="27940" lvl="0" indent="0">
+              <a:buNone/>
+            </a:pPr>
+            <a:r>
+              <a:rPr lang="en-GB" u="sng" dirty="0">
+                <a:hlinkClick r:id="rId3"/>
+              </a:rPr>
+              <a:t>Qualitative Survey Question and Responses</a:t>
+            </a:r>
+            <a:r>
+              <a:rPr lang="en-GB" dirty="0"/>
+              <a:t> </a:t>
+            </a:r>
+            <a:endParaRPr lang="en-GB" dirty="0" smtClean="0"/>
+          </a:p>
+          <a:p>
+            <a:pPr marL="27940" lvl="0" indent="0">
+              <a:buNone/>
+            </a:pPr>
+            <a:endParaRPr lang="en-GB" dirty="0"/>
+          </a:p>
+          <a:p>
+            <a:pPr marL="27940" lvl="0" indent="0">
+              <a:buNone/>
+            </a:pPr>
+            <a:r>
+              <a:rPr lang="en-GB" u="sng" dirty="0">
+                <a:hlinkClick r:id="rId4"/>
+              </a:rPr>
+              <a:t>thematic analysis</a:t>
+            </a:r>
+            <a:r>
+              <a:rPr lang="en-GB" dirty="0"/>
+              <a:t> </a:t>
+            </a:r>
+            <a:endParaRPr lang="en-GB" dirty="0" smtClean="0"/>
+          </a:p>
+          <a:p>
+            <a:pPr marL="27940" lvl="0" indent="0">
+              <a:buNone/>
+            </a:pPr>
+            <a:endParaRPr lang="en-GB" dirty="0"/>
+          </a:p>
+          <a:p>
+            <a:pPr marL="27940" lvl="0" indent="0">
+              <a:buNone/>
+            </a:pPr>
+            <a:r>
+              <a:rPr lang="en-GB" u="sng" dirty="0">
+                <a:hlinkClick r:id="rId5"/>
+              </a:rPr>
+              <a:t>pages/4_Safer_Route_Planner.py</a:t>
+            </a:r>
+            <a:r>
+              <a:rPr lang="en-GB" dirty="0"/>
+              <a:t> </a:t>
+            </a:r>
+            <a:endParaRPr lang="en-GB" dirty="0" smtClean="0"/>
+          </a:p>
+          <a:p>
+            <a:pPr marL="27940" lvl="0" indent="0">
+              <a:buNone/>
+            </a:pPr>
+            <a:endParaRPr lang="en-GB" dirty="0"/>
+          </a:p>
+          <a:p>
+            <a:pPr marL="27940" lvl="0" indent="0">
+              <a:buNone/>
+            </a:pPr>
+            <a:r>
+              <a:rPr lang="en-GB" u="sng" dirty="0" err="1">
+                <a:hlinkClick r:id="rId6"/>
+              </a:rPr>
+              <a:t>config</a:t>
+            </a:r>
+            <a:r>
+              <a:rPr lang="en-GB" u="sng" dirty="0">
+                <a:hlinkClick r:id="rId6"/>
+              </a:rPr>
+              <a:t>/</a:t>
+            </a:r>
+            <a:r>
+              <a:rPr lang="en-GB" u="sng" dirty="0" err="1">
+                <a:hlinkClick r:id="rId6"/>
+              </a:rPr>
+              <a:t>risk_weights.yaml</a:t>
+            </a:r>
+            <a:r>
+              <a:rPr lang="en-GB" dirty="0"/>
+              <a:t> </a:t>
+            </a:r>
             <a:endParaRPr lang="en" dirty="0"/>
-          </a:p>
-          <a:p>
-            <a:pPr marL="27940" lvl="0" indent="0">
-              <a:buNone/>
-            </a:pPr>
-            <a:r>
-              <a:rPr lang="en-GB" dirty="0"/>
-              <a:t>pilot stats in outputs/reports/; updated help text in pages/4_Safer_Route_Planner.py.</a:t>
-            </a:r>
-            <a:endParaRPr lang="en" dirty="0" smtClean="0"/>
           </a:p>
         </p:txBody>
       </p:sp>
@@ -33493,17 +34805,12 @@
             </a:r>
             <a:r>
               <a:rPr lang="en" b="1" dirty="0"/>
-              <a:t>ate</a:t>
-            </a:r>
-            <a:r>
-              <a:rPr lang="en" b="1" dirty="0"/>
-              <a:t>: </a:t>
+              <a:t>ate: </a:t>
             </a:r>
             <a:r>
               <a:rPr lang="en" dirty="0"/>
               <a:t>28/08/2026</a:t>
             </a:r>
-            <a:endParaRPr lang="en" dirty="0"/>
           </a:p>
           <a:p>
             <a:pPr marL="182880" lvl="0" indent="-154940"/>
@@ -33967,35 +35274,108 @@
             <a:endParaRPr lang="en" dirty="0"/>
           </a:p>
           <a:p>
-            <a:pPr marL="27940" lvl="0" indent="0" algn="l" rtl="0">
-              <a:spcBef>
-                <a:spcPts val="0"/>
-              </a:spcBef>
-              <a:spcAft>
-                <a:spcPts val="0"/>
-              </a:spcAft>
-              <a:buSzPts val="1000"/>
-              <a:buNone/>
-            </a:pPr>
+            <a:pPr marL="27940" lvl="0" indent="0">
+              <a:buNone/>
+            </a:pPr>
+            <a:r>
+              <a:rPr lang="en-GB" u="sng" dirty="0">
+                <a:hlinkClick r:id="rId3"/>
+              </a:rPr>
+              <a:t>Qualitative Survey Question and Responses</a:t>
+            </a:r>
+            <a:r>
+              <a:rPr lang="en-GB" dirty="0"/>
+              <a:t> </a:t>
+            </a:r>
+            <a:endParaRPr lang="en-GB" dirty="0" smtClean="0"/>
+          </a:p>
+          <a:p>
+            <a:pPr marL="27940" lvl="0" indent="0">
+              <a:buNone/>
+            </a:pPr>
+            <a:endParaRPr lang="en-GB" dirty="0"/>
+          </a:p>
+          <a:p>
+            <a:pPr marL="27940" lvl="0" indent="0">
+              <a:buNone/>
+            </a:pPr>
+            <a:r>
+              <a:rPr lang="en-GB" u="sng" dirty="0">
+                <a:hlinkClick r:id="rId4"/>
+              </a:rPr>
+              <a:t>analyze_qualitative_survey.py</a:t>
+            </a:r>
+            <a:r>
+              <a:rPr lang="en-GB" dirty="0"/>
+              <a:t> </a:t>
+            </a:r>
+            <a:endParaRPr lang="en-GB" dirty="0" smtClean="0"/>
+          </a:p>
+          <a:p>
+            <a:pPr marL="27940" lvl="0" indent="0">
+              <a:buNone/>
+            </a:pPr>
+            <a:endParaRPr lang="en-GB" dirty="0"/>
+          </a:p>
+          <a:p>
+            <a:pPr marL="27940" lvl="0" indent="0">
+              <a:buNone/>
+            </a:pPr>
+            <a:r>
+              <a:rPr lang="en-GB" u="sng" dirty="0">
+                <a:hlinkClick r:id="rId5"/>
+              </a:rPr>
+              <a:t>thematic analysis</a:t>
+            </a:r>
+            <a:r>
+              <a:rPr lang="en-GB" dirty="0"/>
+              <a:t> </a:t>
+            </a:r>
+            <a:endParaRPr lang="en-GB" dirty="0" smtClean="0"/>
+          </a:p>
+          <a:p>
+            <a:pPr marL="27940" lvl="0" indent="0">
+              <a:buNone/>
+            </a:pPr>
+            <a:endParaRPr lang="en-GB" dirty="0"/>
+          </a:p>
+          <a:p>
+            <a:pPr marL="27940" lvl="0" indent="0">
+              <a:buNone/>
+            </a:pPr>
+            <a:r>
+              <a:rPr lang="en-GB" u="sng" dirty="0">
+                <a:hlinkClick r:id="rId6"/>
+              </a:rPr>
+              <a:t>models/</a:t>
+            </a:r>
+            <a:r>
+              <a:rPr lang="en-GB" dirty="0"/>
+              <a:t> </a:t>
+            </a:r>
+            <a:endParaRPr lang="en-GB" dirty="0" smtClean="0"/>
+          </a:p>
+          <a:p>
+            <a:pPr marL="27940" lvl="0" indent="0">
+              <a:buNone/>
+            </a:pPr>
+            <a:endParaRPr lang="en-GB" dirty="0"/>
+          </a:p>
+          <a:p>
+            <a:pPr marL="27940" lvl="0" indent="0">
+              <a:buNone/>
+            </a:pPr>
+            <a:r>
+              <a:rPr lang="en-GB" u="sng" dirty="0">
+                <a:hlinkClick r:id="rId7"/>
+              </a:rPr>
+              <a:t>screenshots/</a:t>
+            </a:r>
+            <a:r>
+              <a:rPr lang="en-GB" dirty="0"/>
+              <a:t> </a:t>
+            </a:r>
             <a:endParaRPr lang="en" dirty="0" smtClean="0"/>
-          </a:p>
-          <a:p>
-            <a:pPr marL="27940" lvl="0" indent="0">
-              <a:buNone/>
-            </a:pPr>
-            <a:r>
-              <a:rPr lang="en-GB" dirty="0"/>
-              <a:t>outputs/reports/qualitative_survey_means_n10.png; thesis/qualitative_thematic_analysis.md; frozen models/, </a:t>
-            </a:r>
-            <a:r>
-              <a:rPr lang="en-GB" dirty="0" err="1"/>
-              <a:t>config</a:t>
-            </a:r>
-            <a:r>
-              <a:rPr lang="en-GB" dirty="0"/>
-              <a:t>/.</a:t>
-            </a:r>
-            <a:endParaRPr dirty="0"/>
           </a:p>
         </p:txBody>
       </p:sp>
@@ -34504,17 +35884,12 @@
             </a:r>
             <a:r>
               <a:rPr lang="en" b="1" dirty="0"/>
-              <a:t>ate</a:t>
-            </a:r>
-            <a:r>
-              <a:rPr lang="en" b="1" dirty="0"/>
-              <a:t>: </a:t>
+              <a:t>ate: </a:t>
             </a:r>
             <a:r>
               <a:rPr lang="en" dirty="0"/>
               <a:t>02/09/2026</a:t>
             </a:r>
-            <a:endParaRPr lang="en" dirty="0"/>
           </a:p>
           <a:p>
             <a:pPr marL="182880" lvl="0" indent="-154940"/>
@@ -34567,11 +35942,7 @@
             </a:r>
             <a:r>
               <a:rPr lang="en-GB" dirty="0" smtClean="0"/>
-              <a:t>F</a:t>
-            </a:r>
-            <a:r>
-              <a:rPr lang="en-GB" dirty="0" smtClean="0"/>
-              <a:t>ull-sample </a:t>
+              <a:t>Full-sample </a:t>
             </a:r>
             <a:r>
               <a:rPr lang="en-GB" dirty="0"/>
@@ -34965,25 +36336,115 @@
               <a:buSzPts val="1000"/>
               <a:buNone/>
             </a:pPr>
-            <a:endParaRPr lang="en" dirty="0"/>
+            <a:endParaRPr lang="en" dirty="0" smtClean="0"/>
           </a:p>
           <a:p>
             <a:pPr marL="27940" lvl="0" indent="0">
               <a:buNone/>
             </a:pPr>
             <a:r>
+              <a:rPr lang="en-GB" u="sng" dirty="0">
+                <a:hlinkClick r:id="rId3"/>
+              </a:rPr>
+              <a:t>thesis </a:t>
+            </a:r>
+            <a:r>
+              <a:rPr lang="en-GB" u="sng" dirty="0" smtClean="0">
+                <a:hlinkClick r:id="rId3"/>
+              </a:rPr>
+              <a:t>section </a:t>
+            </a:r>
+            <a:r>
+              <a:rPr lang="en-GB" u="sng" dirty="0">
+                <a:hlinkClick r:id="rId3"/>
+              </a:rPr>
+              <a:t>1</a:t>
+            </a:r>
+            <a:r>
               <a:rPr lang="en-GB" dirty="0"/>
-              <a:t>thesis sections </a:t>
-            </a:r>
-            <a:r>
-              <a:rPr lang="en-GB" dirty="0" smtClean="0"/>
-              <a:t>1-3 </a:t>
+              <a:t> </a:t>
+            </a:r>
+            <a:endParaRPr lang="en-GB" dirty="0" smtClean="0"/>
+          </a:p>
+          <a:p>
+            <a:pPr marL="27940" lvl="0" indent="0">
+              <a:buNone/>
+            </a:pPr>
+            <a:r>
+              <a:rPr lang="en-GB" u="sng" dirty="0">
+                <a:hlinkClick r:id="rId3"/>
+              </a:rPr>
+              <a:t>thesis section 1.3</a:t>
             </a:r>
             <a:r>
               <a:rPr lang="en-GB" dirty="0"/>
-              <a:t>draft; thesis/figures/ updated.</a:t>
-            </a:r>
-            <a:endParaRPr dirty="0"/>
+              <a:t> </a:t>
+            </a:r>
+            <a:endParaRPr lang="en-GB" dirty="0" smtClean="0"/>
+          </a:p>
+          <a:p>
+            <a:pPr marL="27940" lvl="0" indent="0">
+              <a:buNone/>
+            </a:pPr>
+            <a:r>
+              <a:rPr lang="en-GB" u="sng" dirty="0">
+                <a:hlinkClick r:id="rId3"/>
+              </a:rPr>
+              <a:t>thesis section 2</a:t>
+            </a:r>
+            <a:r>
+              <a:rPr lang="en-GB" dirty="0"/>
+              <a:t> </a:t>
+            </a:r>
+            <a:endParaRPr lang="en-GB" dirty="0" smtClean="0"/>
+          </a:p>
+          <a:p>
+            <a:pPr marL="27940" lvl="0" indent="0">
+              <a:buNone/>
+            </a:pPr>
+            <a:r>
+              <a:rPr lang="en-GB" u="sng" dirty="0">
+                <a:hlinkClick r:id="rId3"/>
+              </a:rPr>
+              <a:t>thesis section 3</a:t>
+            </a:r>
+            <a:r>
+              <a:rPr lang="en-GB" dirty="0"/>
+              <a:t> </a:t>
+            </a:r>
+            <a:endParaRPr lang="en-GB" dirty="0" smtClean="0"/>
+          </a:p>
+          <a:p>
+            <a:pPr marL="27940" lvl="0" indent="0">
+              <a:buNone/>
+            </a:pPr>
+            <a:r>
+              <a:rPr lang="en-GB" u="sng" dirty="0">
+                <a:hlinkClick r:id="rId3"/>
+              </a:rPr>
+              <a:t>thesis section 3.8</a:t>
+            </a:r>
+            <a:r>
+              <a:rPr lang="en-GB" dirty="0"/>
+              <a:t> </a:t>
+            </a:r>
+            <a:endParaRPr lang="en-GB" dirty="0" smtClean="0"/>
+          </a:p>
+          <a:p>
+            <a:pPr marL="27940" lvl="0" indent="0">
+              <a:buNone/>
+            </a:pPr>
+            <a:r>
+              <a:rPr lang="en-GB" u="sng" dirty="0">
+                <a:hlinkClick r:id="rId4"/>
+              </a:rPr>
+              <a:t>thesis/figures/</a:t>
+            </a:r>
+            <a:r>
+              <a:rPr lang="en-GB" dirty="0"/>
+              <a:t> </a:t>
+            </a:r>
+            <a:endParaRPr lang="en-GB" dirty="0"/>
           </a:p>
         </p:txBody>
       </p:sp>
@@ -35929,30 +37390,133 @@
               <a:buSzPts val="1000"/>
               <a:buNone/>
             </a:pPr>
+            <a:endParaRPr lang="en" dirty="0" smtClean="0"/>
+          </a:p>
+          <a:p>
+            <a:pPr marL="27940" lvl="0" indent="0">
+              <a:buNone/>
+            </a:pPr>
+            <a:r>
+              <a:rPr lang="en-GB" u="sng" dirty="0">
+                <a:hlinkClick r:id="rId3"/>
+              </a:rPr>
+              <a:t>thesis section 4.1</a:t>
+            </a:r>
+            <a:r>
+              <a:rPr lang="en-GB" dirty="0"/>
+              <a:t> </a:t>
+            </a:r>
+            <a:endParaRPr lang="en-GB" dirty="0" smtClean="0"/>
+          </a:p>
+          <a:p>
+            <a:pPr marL="27940" lvl="0" indent="0">
+              <a:buNone/>
+            </a:pPr>
+            <a:endParaRPr lang="en-GB" dirty="0"/>
+          </a:p>
+          <a:p>
+            <a:pPr marL="27940" lvl="0" indent="0">
+              <a:buNone/>
+            </a:pPr>
+            <a:r>
+              <a:rPr lang="en-GB" u="sng" dirty="0">
+                <a:hlinkClick r:id="rId3"/>
+              </a:rPr>
+              <a:t>thesis section 4</a:t>
+            </a:r>
+            <a:r>
+              <a:rPr lang="en-GB" dirty="0"/>
+              <a:t> </a:t>
+            </a:r>
+            <a:endParaRPr lang="en-GB" dirty="0" smtClean="0"/>
+          </a:p>
+          <a:p>
+            <a:pPr marL="27940" lvl="0" indent="0">
+              <a:buNone/>
+            </a:pPr>
+            <a:endParaRPr lang="en-GB" dirty="0"/>
+          </a:p>
+          <a:p>
+            <a:pPr marL="27940" lvl="0" indent="0">
+              <a:buNone/>
+            </a:pPr>
+            <a:r>
+              <a:rPr lang="en-GB" u="sng" dirty="0">
+                <a:hlinkClick r:id="rId3"/>
+              </a:rPr>
+              <a:t>thesis section 5</a:t>
+            </a:r>
+            <a:r>
+              <a:rPr lang="en-GB" dirty="0"/>
+              <a:t> </a:t>
+            </a:r>
+            <a:endParaRPr lang="en-GB" dirty="0" smtClean="0"/>
+          </a:p>
+          <a:p>
+            <a:pPr marL="27940" lvl="0" indent="0">
+              <a:buNone/>
+            </a:pPr>
+            <a:endParaRPr lang="en-GB" dirty="0"/>
+          </a:p>
+          <a:p>
+            <a:pPr marL="27940" lvl="0" indent="0">
+              <a:buNone/>
+            </a:pPr>
+            <a:r>
+              <a:rPr lang="en-GB" u="sng" dirty="0">
+                <a:hlinkClick r:id="rId3"/>
+              </a:rPr>
+              <a:t>thesis section 6</a:t>
+            </a:r>
+            <a:r>
+              <a:rPr lang="en-GB" dirty="0"/>
+              <a:t> </a:t>
+            </a:r>
+            <a:endParaRPr lang="en-GB" dirty="0" smtClean="0"/>
+          </a:p>
+          <a:p>
+            <a:pPr marL="27940" lvl="0" indent="0">
+              <a:buNone/>
+            </a:pPr>
+            <a:endParaRPr lang="en-GB" dirty="0"/>
+          </a:p>
+          <a:p>
+            <a:pPr marL="27940" lvl="0" indent="0">
+              <a:buNone/>
+            </a:pPr>
+            <a:r>
+              <a:rPr lang="en-GB" u="sng" dirty="0">
+                <a:hlinkClick r:id="rId3"/>
+              </a:rPr>
+              <a:t>thesis section 7</a:t>
+            </a:r>
+            <a:r>
+              <a:rPr lang="en-GB" dirty="0"/>
+              <a:t> </a:t>
+            </a:r>
+            <a:endParaRPr lang="en-GB" dirty="0" smtClean="0"/>
+          </a:p>
+          <a:p>
+            <a:pPr marL="27940" lvl="0" indent="0">
+              <a:buNone/>
+            </a:pPr>
+            <a:endParaRPr lang="en-GB" dirty="0"/>
+          </a:p>
+          <a:p>
+            <a:pPr marL="27940" lvl="0" indent="0">
+              <a:buNone/>
+            </a:pPr>
+            <a:r>
+              <a:rPr lang="en-GB" u="sng">
+                <a:hlinkClick r:id="rId3"/>
+              </a:rPr>
+              <a:t>thesis abstract</a:t>
+            </a:r>
+            <a:r>
+              <a:rPr lang="en-GB"/>
+              <a:t> </a:t>
+            </a:r>
             <a:endParaRPr lang="en" dirty="0"/>
-          </a:p>
-          <a:p>
-            <a:pPr marL="27940" lvl="0" indent="0" algn="l" rtl="0">
-              <a:spcBef>
-                <a:spcPts val="0"/>
-              </a:spcBef>
-              <a:spcAft>
-                <a:spcPts val="0"/>
-              </a:spcAft>
-              <a:buSzPts val="1000"/>
-              <a:buNone/>
-            </a:pPr>
-            <a:endParaRPr lang="en" dirty="0"/>
-          </a:p>
-          <a:p>
-            <a:pPr marL="27940" lvl="0" indent="0">
-              <a:buNone/>
-            </a:pPr>
-            <a:r>
-              <a:rPr lang="en-GB" dirty="0"/>
-              <a:t>thesis sections 4–7 complete; final abstract.</a:t>
-            </a:r>
-            <a:endParaRPr lang="en" dirty="0" smtClean="0"/>
           </a:p>
         </p:txBody>
       </p:sp>
@@ -36079,7 +37643,6 @@
               <a:rPr lang="en" dirty="0"/>
               <a:t>What didn’t go so well? </a:t>
             </a:r>
-            <a:endParaRPr lang="en" dirty="0"/>
           </a:p>
           <a:p>
             <a:pPr marL="27940" lvl="0" indent="0" algn="l" rtl="0">
@@ -36472,17 +38035,12 @@
             </a:r>
             <a:r>
               <a:rPr lang="en" b="1" dirty="0"/>
-              <a:t>ate</a:t>
-            </a:r>
-            <a:r>
-              <a:rPr lang="en" b="1" dirty="0"/>
-              <a:t>: </a:t>
+              <a:t>ate: </a:t>
             </a:r>
             <a:r>
               <a:rPr lang="en" dirty="0"/>
               <a:t>17/09/2026</a:t>
             </a:r>
-            <a:endParaRPr lang="en" dirty="0"/>
           </a:p>
           <a:p>
             <a:pPr marL="182880" lvl="0" indent="-154940"/>
@@ -36532,11 +38090,7 @@
             </a:r>
             <a:r>
               <a:rPr lang="en-GB" dirty="0" smtClean="0"/>
-              <a:t>Fu</a:t>
-            </a:r>
-            <a:r>
-              <a:rPr lang="en-GB" dirty="0" smtClean="0"/>
-              <a:t>ll </a:t>
+              <a:t>Full </a:t>
             </a:r>
             <a:r>
               <a:rPr lang="en-GB" dirty="0"/>
@@ -36552,11 +38106,7 @@
             </a:r>
             <a:r>
               <a:rPr lang="en-GB" dirty="0" smtClean="0"/>
-              <a:t>C</a:t>
-            </a:r>
-            <a:r>
-              <a:rPr lang="en-GB" dirty="0" smtClean="0"/>
-              <a:t>ompleted </a:t>
+              <a:t>Completed </a:t>
             </a:r>
             <a:r>
               <a:rPr lang="en-GB" dirty="0"/>
@@ -37085,7 +38635,6 @@
               <a:rPr lang="en" dirty="0"/>
               <a:t>What didn’t go so well? </a:t>
             </a:r>
-            <a:endParaRPr lang="en" dirty="0"/>
           </a:p>
           <a:p>
             <a:pPr marL="27940" lvl="0" indent="0">
@@ -37459,17 +39008,12 @@
             </a:r>
             <a:r>
               <a:rPr lang="en" b="1" dirty="0"/>
-              <a:t>ate</a:t>
-            </a:r>
-            <a:r>
-              <a:rPr lang="en" b="1" dirty="0"/>
-              <a:t>: </a:t>
+              <a:t>ate: </a:t>
             </a:r>
             <a:r>
               <a:rPr lang="en" dirty="0"/>
               <a:t>25/09/2026</a:t>
             </a:r>
-            <a:endParaRPr lang="en" dirty="0"/>
           </a:p>
           <a:p>
             <a:pPr marL="182880" lvl="0" indent="-154940"/>
@@ -37523,11 +39067,7 @@
             </a:r>
             <a:r>
               <a:rPr lang="en-GB" dirty="0" smtClean="0"/>
-              <a:t>F</a:t>
-            </a:r>
-            <a:r>
-              <a:rPr lang="en-GB" dirty="0" smtClean="0"/>
-              <a:t>inal </a:t>
+              <a:t>Final </a:t>
             </a:r>
             <a:r>
               <a:rPr lang="en-GB" dirty="0"/>
@@ -47259,25 +48799,59 @@
               <a:buSzPts val="1000"/>
               <a:buNone/>
             </a:pPr>
+            <a:endParaRPr lang="en" dirty="0" smtClean="0"/>
+          </a:p>
+          <a:p>
+            <a:pPr marL="27940" lvl="0" indent="0" algn="l" rtl="0">
+              <a:spcBef>
+                <a:spcPts val="0"/>
+              </a:spcBef>
+              <a:spcAft>
+                <a:spcPts val="0"/>
+              </a:spcAft>
+              <a:buSzPts val="1000"/>
+              <a:buNone/>
+            </a:pPr>
             <a:endParaRPr lang="en" dirty="0"/>
           </a:p>
           <a:p>
-            <a:pPr marL="27940" lvl="0" indent="0">
-              <a:buNone/>
-            </a:pPr>
-            <a:r>
-              <a:rPr lang="en-GB" dirty="0"/>
-              <a:t>repo + requirements.txt committed; </a:t>
-            </a:r>
-            <a:r>
-              <a:rPr lang="en-GB" dirty="0" err="1"/>
-              <a:t>references.bib</a:t>
-            </a:r>
-            <a:r>
-              <a:rPr lang="en-GB" dirty="0"/>
-              <a:t> populated; H1–H4 wording in PROJECT_CONTEXT.md.</a:t>
-            </a:r>
-            <a:endParaRPr dirty="0"/>
+            <a:pPr marL="27940" lvl="0" indent="0" algn="l" rtl="0">
+              <a:spcBef>
+                <a:spcPts val="0"/>
+              </a:spcBef>
+              <a:spcAft>
+                <a:spcPts val="0"/>
+              </a:spcAft>
+              <a:buSzPts val="1000"/>
+              <a:buNone/>
+            </a:pPr>
+            <a:endParaRPr lang="en" dirty="0" smtClean="0"/>
+          </a:p>
+          <a:p>
+            <a:pPr marL="27940" lvl="0" indent="0" algn="l" rtl="0">
+              <a:spcBef>
+                <a:spcPts val="0"/>
+              </a:spcBef>
+              <a:spcAft>
+                <a:spcPts val="0"/>
+              </a:spcAft>
+              <a:buSzPts val="1000"/>
+              <a:buNone/>
+            </a:pPr>
+            <a:endParaRPr lang="en" dirty="0"/>
+          </a:p>
+          <a:p>
+            <a:pPr marL="27940" lvl="0" indent="0" algn="l" rtl="0">
+              <a:spcBef>
+                <a:spcPts val="0"/>
+              </a:spcBef>
+              <a:spcAft>
+                <a:spcPts val="0"/>
+              </a:spcAft>
+              <a:buSzPts val="1000"/>
+              <a:buNone/>
+            </a:pPr>
+            <a:endParaRPr lang="en" dirty="0"/>
           </a:p>
         </p:txBody>
       </p:sp>
@@ -47633,6 +49207,198 @@
           </a:p>
         </p:txBody>
       </p:sp>
+      <p:graphicFrame>
+        <p:nvGraphicFramePr>
+          <p:cNvPr id="3" name="Table 2"/>
+          <p:cNvGraphicFramePr>
+            <a:graphicFrameLocks noGrp="1"/>
+          </p:cNvGraphicFramePr>
+          <p:nvPr>
+            <p:extLst>
+              <p:ext uri="{D42A27DB-BD31-4B8C-83A1-F6EECF244321}">
+                <p14:modId xmlns:p14="http://schemas.microsoft.com/office/powerpoint/2010/main" val="2103711854"/>
+              </p:ext>
+            </p:extLst>
+          </p:nvPr>
+        </p:nvGraphicFramePr>
+        <p:xfrm>
+          <a:off x="344557" y="3677478"/>
+          <a:ext cx="1231900" cy="809625"/>
+        </p:xfrm>
+        <a:graphic>
+          <a:graphicData uri="http://schemas.openxmlformats.org/drawingml/2006/table">
+            <a:tbl>
+              <a:tblPr>
+                <a:tableStyleId>{764D4AE7-FFBC-431D-9275-528F30A785D3}</a:tableStyleId>
+              </a:tblPr>
+              <a:tblGrid>
+                <a:gridCol w="1231900">
+                  <a:extLst>
+                    <a:ext uri="{9D8B030D-6E8A-4147-A177-3AD203B41FA5}">
+                      <a16:colId xmlns:a16="http://schemas.microsoft.com/office/drawing/2014/main" val="431691437"/>
+                    </a:ext>
+                  </a:extLst>
+                </a:gridCol>
+              </a:tblGrid>
+              <a:tr h="161925">
+                <a:tc>
+                  <a:txBody>
+                    <a:bodyPr/>
+                    <a:lstStyle/>
+                    <a:p>
+                      <a:pPr algn="l" fontAlgn="b"/>
+                      <a:r>
+                        <a:rPr lang="en-GB" sz="1000" u="sng" strike="noStrike" dirty="0">
+                          <a:effectLst/>
+                          <a:hlinkClick r:id="rId3"/>
+                        </a:rPr>
+                        <a:t>repo root</a:t>
+                      </a:r>
+                      <a:endParaRPr lang="en-GB" sz="1000" b="0" i="0" u="sng" strike="noStrike" dirty="0">
+                        <a:solidFill>
+                          <a:srgbClr val="0563C1"/>
+                        </a:solidFill>
+                        <a:effectLst/>
+                        <a:latin typeface="Arial" panose="020B0604020202020204" pitchFamily="34" charset="0"/>
+                      </a:endParaRPr>
+                    </a:p>
+                  </a:txBody>
+                  <a:tcPr marL="9525" marR="9525" marT="9525" marB="0" anchor="b"/>
+                </a:tc>
+                <a:extLst>
+                  <a:ext uri="{0D108BD9-81ED-4DB2-BD59-A6C34878D82A}">
+                    <a16:rowId xmlns:a16="http://schemas.microsoft.com/office/drawing/2014/main" val="1191797150"/>
+                  </a:ext>
+                </a:extLst>
+              </a:tr>
+              <a:tr h="161925">
+                <a:tc>
+                  <a:txBody>
+                    <a:bodyPr/>
+                    <a:lstStyle/>
+                    <a:p>
+                      <a:pPr algn="l" fontAlgn="b"/>
+                      <a:r>
+                        <a:rPr lang="en-GB" sz="1000" u="sng" strike="noStrike">
+                          <a:effectLst/>
+                          <a:hlinkClick r:id="rId4"/>
+                        </a:rPr>
+                        <a:t>requirements.txt</a:t>
+                      </a:r>
+                      <a:endParaRPr lang="en-GB" sz="1000" b="0" i="0" u="sng" strike="noStrike">
+                        <a:solidFill>
+                          <a:srgbClr val="0563C1"/>
+                        </a:solidFill>
+                        <a:effectLst/>
+                        <a:latin typeface="Arial" panose="020B0604020202020204" pitchFamily="34" charset="0"/>
+                      </a:endParaRPr>
+                    </a:p>
+                  </a:txBody>
+                  <a:tcPr marL="9525" marR="9525" marT="9525" marB="0" anchor="b"/>
+                </a:tc>
+                <a:extLst>
+                  <a:ext uri="{0D108BD9-81ED-4DB2-BD59-A6C34878D82A}">
+                    <a16:rowId xmlns:a16="http://schemas.microsoft.com/office/drawing/2014/main" val="902013584"/>
+                  </a:ext>
+                </a:extLst>
+              </a:tr>
+              <a:tr h="161925">
+                <a:tc>
+                  <a:txBody>
+                    <a:bodyPr/>
+                    <a:lstStyle/>
+                    <a:p>
+                      <a:pPr algn="l" fontAlgn="b"/>
+                      <a:r>
+                        <a:rPr lang="en-GB" sz="1000" u="sng" strike="noStrike">
+                          <a:effectLst/>
+                          <a:hlinkClick r:id="rId5"/>
+                        </a:rPr>
+                        <a:t>references.bib</a:t>
+                      </a:r>
+                      <a:endParaRPr lang="en-GB" sz="1000" b="0" i="0" u="sng" strike="noStrike">
+                        <a:solidFill>
+                          <a:srgbClr val="0563C1"/>
+                        </a:solidFill>
+                        <a:effectLst/>
+                        <a:latin typeface="Arial" panose="020B0604020202020204" pitchFamily="34" charset="0"/>
+                      </a:endParaRPr>
+                    </a:p>
+                  </a:txBody>
+                  <a:tcPr marL="9525" marR="9525" marT="9525" marB="0" anchor="b"/>
+                </a:tc>
+                <a:extLst>
+                  <a:ext uri="{0D108BD9-81ED-4DB2-BD59-A6C34878D82A}">
+                    <a16:rowId xmlns:a16="http://schemas.microsoft.com/office/drawing/2014/main" val="248491065"/>
+                  </a:ext>
+                </a:extLst>
+              </a:tr>
+              <a:tr h="161925">
+                <a:tc>
+                  <a:txBody>
+                    <a:bodyPr/>
+                    <a:lstStyle/>
+                    <a:p>
+                      <a:pPr algn="l" fontAlgn="b"/>
+                      <a:r>
+                        <a:rPr lang="en-GB" sz="1000" u="sng" strike="noStrike" dirty="0" err="1">
+                          <a:effectLst/>
+                          <a:hlinkClick r:id="rId5"/>
+                        </a:rPr>
+                        <a:t>references.bib</a:t>
+                      </a:r>
+                      <a:endParaRPr lang="en-GB" sz="1000" b="0" i="0" u="sng" strike="noStrike" dirty="0">
+                        <a:solidFill>
+                          <a:srgbClr val="0563C1"/>
+                        </a:solidFill>
+                        <a:effectLst/>
+                        <a:latin typeface="Arial" panose="020B0604020202020204" pitchFamily="34" charset="0"/>
+                      </a:endParaRPr>
+                    </a:p>
+                  </a:txBody>
+                  <a:tcPr marL="9525" marR="9525" marT="9525" marB="0" anchor="b"/>
+                </a:tc>
+                <a:extLst>
+                  <a:ext uri="{0D108BD9-81ED-4DB2-BD59-A6C34878D82A}">
+                    <a16:rowId xmlns:a16="http://schemas.microsoft.com/office/drawing/2014/main" val="846664293"/>
+                  </a:ext>
+                </a:extLst>
+              </a:tr>
+              <a:tr h="161925">
+                <a:tc>
+                  <a:txBody>
+                    <a:bodyPr/>
+                    <a:lstStyle/>
+                    <a:p>
+                      <a:pPr algn="l" fontAlgn="b"/>
+                      <a:r>
+                        <a:rPr lang="en-GB" sz="1000" u="sng" strike="noStrike" dirty="0">
+                          <a:effectLst/>
+                          <a:hlinkClick r:id="rId6"/>
+                        </a:rPr>
+                        <a:t>thesis 3.2</a:t>
+                      </a:r>
+                      <a:endParaRPr lang="en-GB" sz="1000" b="0" i="0" u="sng" strike="noStrike" dirty="0">
+                        <a:solidFill>
+                          <a:srgbClr val="0563C1"/>
+                        </a:solidFill>
+                        <a:effectLst/>
+                        <a:latin typeface="Arial" panose="020B0604020202020204" pitchFamily="34" charset="0"/>
+                      </a:endParaRPr>
+                    </a:p>
+                  </a:txBody>
+                  <a:tcPr marL="9525" marR="9525" marT="9525" marB="0" anchor="b"/>
+                </a:tc>
+                <a:extLst>
+                  <a:ext uri="{0D108BD9-81ED-4DB2-BD59-A6C34878D82A}">
+                    <a16:rowId xmlns:a16="http://schemas.microsoft.com/office/drawing/2014/main" val="691526948"/>
+                  </a:ext>
+                </a:extLst>
+              </a:tr>
+            </a:tbl>
+          </a:graphicData>
+        </a:graphic>
+      </p:graphicFrame>
     </p:spTree>
   </p:cSld>
   <p:clrMapOvr>
